--- a/writeup2/poster-summer-1.1/summer_showcase.pptx
+++ b/writeup2/poster-summer-1.1/summer_showcase.pptx
@@ -3341,14 +3341,14 @@
               </a:defRPr>
             </a:pPr>
             <a:r>
-              <a:t>SUMMER RESEARCH SHOWCASE · 2026</a:t>
-            </a:r>
-          </a:p>
-        </p:txBody>
-      </p:sp>
-      <p:sp>
-        <p:nvSpPr>
-          <p:cNvPr id="8" name="Background &amp; Research Question"/>
+              <a:t>Summer research showcase · 2026</a:t>
+            </a:r>
+          </a:p>
+        </p:txBody>
+      </p:sp>
+      <p:sp>
+        <p:nvSpPr>
+          <p:cNvPr id="8" name="Background and research question"/>
           <p:cNvSpPr/>
           <p:nvPr/>
         </p:nvSpPr>
@@ -3433,7 +3433,7 @@
               </a:defRPr>
             </a:pPr>
             <a:r>
-              <a:t>Background &amp; Research Question</a:t>
+              <a:t>Background and research question</a:t>
             </a:r>
           </a:p>
         </p:txBody>
@@ -3523,7 +3523,7 @@
               </a:defRPr>
             </a:pPr>
             <a:r>
-              <a:t>Soil moisture describes water stored near the land surface. It informs</a:t>
+              <a:t>Soil moisture is the amount of water held in soil. Daily estimates help</a:t>
             </a:r>
           </a:p>
           <a:p>
@@ -3545,7 +3545,7 @@
               </a:defRPr>
             </a:pPr>
             <a:r>
-              <a:t>irrigation, drought monitoring, and our understanding of water</a:t>
+              <a:t>with irrigation planning and drought monitoring. They show how</a:t>
             </a:r>
           </a:p>
           <a:p>
@@ -3567,7 +3567,7 @@
               </a:defRPr>
             </a:pPr>
             <a:r>
-              <a:t>availability. Estimates help us follow rainfall responses and drying</a:t>
+              <a:t>moisture changes after rain and during dry periods, including places</a:t>
             </a:r>
           </a:p>
           <a:p>
@@ -3589,7 +3589,7 @@
               </a:defRPr>
             </a:pPr>
             <a:r>
-              <a:t>where direct measurements are sparse.</a:t>
+              <a:t>with few direct measurements.</a:t>
             </a:r>
           </a:p>
         </p:txBody>
@@ -3634,7 +3634,7 @@
               </a:defRPr>
             </a:pPr>
             <a:r>
-              <a:t>Ground sensors measure local conditions; satellites offer broader</a:t>
+              <a:t>Ground sensors measure moisture at individual sites. Satellite</a:t>
             </a:r>
           </a:p>
           <a:p>
@@ -3656,7 +3656,7 @@
               </a:defRPr>
             </a:pPr>
             <a:r>
-              <a:t>coverage, but leave gaps between observations and missing retrievals.</a:t>
+              <a:t>observations cover larger areas but are intermittent, with some</a:t>
             </a:r>
           </a:p>
           <a:p>
@@ -3678,7 +3678,7 @@
               </a:defRPr>
             </a:pPr>
             <a:r>
-              <a:t>Our project combines satellite, weather, and site information for daily</a:t>
+              <a:t>retrievals missing. We combine satellite, weather, and site data for</a:t>
             </a:r>
           </a:p>
           <a:p>
@@ -3700,7 +3700,7 @@
               </a:defRPr>
             </a:pPr>
             <a:r>
-              <a:t>estimates. Earlier work established this pipeline and a single global</a:t>
+              <a:t>daily estimates. Earlier work produced the pipeline and a global</a:t>
             </a:r>
           </a:p>
           <a:p>
@@ -3722,7 +3722,7 @@
               </a:defRPr>
             </a:pPr>
             <a:r>
-              <a:t>XGBoost predictor.</a:t>
+              <a:t>XGBoost model.</a:t>
             </a:r>
           </a:p>
         </p:txBody>
@@ -3814,7 +3814,7 @@
               </a:defRPr>
             </a:pPr>
             <a:r>
-              <a:t>THE SUMMER RESEARCH QUESTION</a:t>
+              <a:t>Summer research question</a:t>
             </a:r>
           </a:p>
         </p:txBody>
@@ -3895,7 +3895,7 @@
         <p:spPr>
           <a:xfrm>
             <a:off x="685800" y="9147810"/>
-            <a:ext cx="10058400" cy="1318767"/>
+            <a:ext cx="10058400" cy="989075"/>
           </a:xfrm>
           <a:prstGeom prst="rect">
             <a:avLst/>
@@ -3926,7 +3926,7 @@
               </a:defRPr>
             </a:pPr>
             <a:r>
-              <a:t>This summer's work tests feature-based specialization against the</a:t>
+              <a:t>Our comparison uses the same evaluation conditions for both models.</a:t>
             </a:r>
           </a:p>
           <a:p>
@@ -3948,7 +3948,7 @@
               </a:defRPr>
             </a:pPr>
             <a:r>
-              <a:t>global predictor, adds consistent assignment for known stations, and</a:t>
+              <a:t>For known stations, we fix a single specialist; tests at new sites</a:t>
             </a:r>
           </a:p>
           <a:p>
@@ -3970,42 +3970,20 @@
               </a:defRPr>
             </a:pPr>
             <a:r>
-              <a:t>examines how missing routing inputs affect estimates at new sensor</a:t>
-            </a:r>
-          </a:p>
-          <a:p>
-            <a:pPr algn="l">
-              <a:lnSpc>
-                <a:spcPts val="2595"/>
-              </a:lnSpc>
-              <a:spcBef>
-                <a:spcPts val="0"/>
-              </a:spcBef>
-              <a:spcAft>
-                <a:spcPts val="0"/>
-              </a:spcAft>
-              <a:defRPr sz="2200" b="0">
-                <a:solidFill>
-                  <a:srgbClr val="202B35"/>
-                </a:solidFill>
-                <a:latin typeface="DejaVu Sans"/>
-              </a:defRPr>
-            </a:pPr>
-            <a:r>
-              <a:t>sites.</a:t>
-            </a:r>
-          </a:p>
-        </p:txBody>
-      </p:sp>
-      <p:sp>
-        <p:nvSpPr>
-          <p:cNvPr id="17" name="Study Area &amp; Data"/>
+              <a:t>examine how missing satellite inputs affect assignment.</a:t>
+            </a:r>
+          </a:p>
+        </p:txBody>
+      </p:sp>
+      <p:sp>
+        <p:nvSpPr>
+          <p:cNvPr id="17" name="Study area and data"/>
           <p:cNvSpPr/>
           <p:nvPr/>
         </p:nvSpPr>
         <p:spPr>
           <a:xfrm>
-            <a:off x="502920" y="10576305"/>
+            <a:off x="502920" y="10246614"/>
             <a:ext cx="10424160" cy="502920"/>
           </a:xfrm>
           <a:prstGeom prst="roundRect">
@@ -4052,7 +4030,7 @@
         </p:nvSpPr>
         <p:spPr>
           <a:xfrm>
-            <a:off x="594360" y="10597337"/>
+            <a:off x="594360" y="10267645"/>
             <a:ext cx="10241280" cy="466344"/>
           </a:xfrm>
           <a:prstGeom prst="rect">
@@ -4084,7 +4062,7 @@
               </a:defRPr>
             </a:pPr>
             <a:r>
-              <a:t>Study Area &amp; Data</a:t>
+              <a:t>Study area and data</a:t>
             </a:r>
           </a:p>
         </p:txBody>
@@ -4105,7 +4083,7 @@
         </p:blipFill>
         <p:spPr>
           <a:xfrm>
-            <a:off x="685800" y="11234674"/>
+            <a:off x="685800" y="10904982"/>
             <a:ext cx="6400800" cy="4114800"/>
           </a:xfrm>
           <a:prstGeom prst="rect">
@@ -4121,7 +4099,7 @@
         </p:nvSpPr>
         <p:spPr>
           <a:xfrm>
-            <a:off x="7406640" y="11463274"/>
+            <a:off x="7406640" y="11133582"/>
             <a:ext cx="3337560" cy="347472"/>
           </a:xfrm>
           <a:prstGeom prst="rect">
@@ -4166,8 +4144,8 @@
         </p:nvSpPr>
         <p:spPr>
           <a:xfrm>
-            <a:off x="7406640" y="11938762"/>
-            <a:ext cx="3337560" cy="2997200"/>
+            <a:off x="7406640" y="11609070"/>
+            <a:ext cx="3337560" cy="3296919"/>
           </a:xfrm>
           <a:prstGeom prst="rect">
             <a:avLst/>
@@ -4198,7 +4176,7 @@
               </a:defRPr>
             </a:pPr>
             <a:r>
-              <a:t>Washington spans coastal</a:t>
+              <a:t>Our stations span the</a:t>
             </a:r>
           </a:p>
           <a:p>
@@ -4220,7 +4198,7 @@
               </a:defRPr>
             </a:pPr>
             <a:r>
-              <a:t>sites, Cascade mountains,</a:t>
+              <a:t>coast, Cascade</a:t>
             </a:r>
           </a:p>
           <a:p>
@@ -4242,7 +4220,7 @@
               </a:defRPr>
             </a:pPr>
             <a:r>
-              <a:t>and a drier east. We ask</a:t>
+              <a:t>mountains, and drier</a:t>
             </a:r>
           </a:p>
           <a:p>
@@ -4264,7 +4242,7 @@
               </a:defRPr>
             </a:pPr>
             <a:r>
-              <a:t>whether two specialists</a:t>
+              <a:t>eastern Washington.</a:t>
             </a:r>
           </a:p>
           <a:p>
@@ -4286,7 +4264,7 @@
               </a:defRPr>
             </a:pPr>
             <a:r>
-              <a:t>can learn distinct soil</a:t>
+              <a:t>They let us study how soil</a:t>
             </a:r>
           </a:p>
           <a:p>
@@ -4308,7 +4286,7 @@
               </a:defRPr>
             </a:pPr>
             <a:r>
-              <a:t>responses in these</a:t>
+              <a:t>moisture relates to inputs</a:t>
             </a:r>
           </a:p>
           <a:p>
@@ -4330,7 +4308,7 @@
               </a:defRPr>
             </a:pPr>
             <a:r>
-              <a:t>settings. Each station</a:t>
+              <a:t>under different</a:t>
             </a:r>
           </a:p>
           <a:p>
@@ -4352,7 +4330,7 @@
               </a:defRPr>
             </a:pPr>
             <a:r>
-              <a:t>holdout tests how well</a:t>
+              <a:t>conditions. Station</a:t>
             </a:r>
           </a:p>
           <a:p>
@@ -4374,7 +4352,7 @@
               </a:defRPr>
             </a:pPr>
             <a:r>
-              <a:t>these patterns carry to a</a:t>
+              <a:t>holdouts test whether the</a:t>
             </a:r>
           </a:p>
           <a:p>
@@ -4396,7 +4374,29 @@
               </a:defRPr>
             </a:pPr>
             <a:r>
-              <a:t>new site.</a:t>
+              <a:t>models can estimate</a:t>
+            </a:r>
+          </a:p>
+          <a:p>
+            <a:pPr algn="l">
+              <a:lnSpc>
+                <a:spcPts val="2360"/>
+              </a:lnSpc>
+              <a:spcBef>
+                <a:spcPts val="0"/>
+              </a:spcBef>
+              <a:spcAft>
+                <a:spcPts val="0"/>
+              </a:spcAft>
+              <a:defRPr sz="2000" b="0">
+                <a:solidFill>
+                  <a:srgbClr val="536875"/>
+                </a:solidFill>
+                <a:latin typeface="DejaVu Sans"/>
+              </a:defRPr>
+            </a:pPr>
+            <a:r>
+              <a:t>moisture at a new site.</a:t>
             </a:r>
           </a:p>
         </p:txBody>
@@ -4409,7 +4409,7 @@
         </p:nvSpPr>
         <p:spPr>
           <a:xfrm>
-            <a:off x="685800" y="15413481"/>
+            <a:off x="685800" y="15083790"/>
             <a:ext cx="10058400" cy="599439"/>
           </a:xfrm>
           <a:prstGeom prst="rect">
@@ -4441,7 +4441,7 @@
               </a:defRPr>
             </a:pPr>
             <a:r>
-              <a:t>Figure 1. Seven Washington training stations and their fitted memberships;</a:t>
+              <a:t>Figure 1. The seven training stations and their fitted groups. Colors identify</a:t>
             </a:r>
           </a:p>
           <a:p>
@@ -4463,7 +4463,7 @@
               </a:defRPr>
             </a:pPr>
             <a:r>
-              <a:t>points do not define geographic regime boundaries.</a:t>
+              <a:t>station assignments, with no geographic boundaries implied.</a:t>
             </a:r>
           </a:p>
         </p:txBody>
@@ -4476,8 +4476,8 @@
         </p:nvSpPr>
         <p:spPr>
           <a:xfrm>
-            <a:off x="685800" y="16140937"/>
-            <a:ext cx="10058400" cy="1318767"/>
+            <a:off x="685800" y="15811246"/>
+            <a:ext cx="10058400" cy="2307844"/>
           </a:xfrm>
           <a:prstGeom prst="rect">
             <a:avLst/>
@@ -4508,7 +4508,7 @@
               </a:defRPr>
             </a:pPr>
             <a:r>
-              <a:t>NOAA USCRN and SNOTEL supply in-situ observations. Inputs combine</a:t>
+              <a:t>NOAA USCRN and SNOTEL stations provide measured soil moisture.</a:t>
             </a:r>
           </a:p>
           <a:p>
@@ -4530,7 +4530,7 @@
               </a:defRPr>
             </a:pPr>
             <a:r>
-              <a:t>SMAP moisture, Sentinel radar and optical measurements, MODIS</a:t>
+              <a:t>Satellite inputs include SMAP soil moisture, Sentinel-1 radar</a:t>
             </a:r>
           </a:p>
           <a:p>
@@ -4552,7 +4552,7 @@
               </a:defRPr>
             </a:pPr>
             <a:r>
-              <a:t>temperature and vegetation, ERA5-Land weather, and terrain, climate,</a:t>
+              <a:t>backscatter from the land surface, and Sentinel-2 surface reflectance</a:t>
             </a:r>
           </a:p>
           <a:p>
@@ -4574,7 +4574,73 @@
               </a:defRPr>
             </a:pPr>
             <a:r>
-              <a:t>land-cover, and soil descriptors.</a:t>
+              <a:t>and indices of vegetation greenness and canopy water content. We</a:t>
+            </a:r>
+          </a:p>
+          <a:p>
+            <a:pPr algn="l">
+              <a:lnSpc>
+                <a:spcPts val="2595"/>
+              </a:lnSpc>
+              <a:spcBef>
+                <a:spcPts val="0"/>
+              </a:spcBef>
+              <a:spcAft>
+                <a:spcPts val="0"/>
+              </a:spcAft>
+              <a:defRPr sz="2200" b="0">
+                <a:solidFill>
+                  <a:srgbClr val="202B35"/>
+                </a:solidFill>
+                <a:latin typeface="DejaVu Sans"/>
+              </a:defRPr>
+            </a:pPr>
+            <a:r>
+              <a:t>also use MODIS land-surface temperature and vegetation indices,</a:t>
+            </a:r>
+          </a:p>
+          <a:p>
+            <a:pPr algn="l">
+              <a:lnSpc>
+                <a:spcPts val="2595"/>
+              </a:lnSpc>
+              <a:spcBef>
+                <a:spcPts val="0"/>
+              </a:spcBef>
+              <a:spcAft>
+                <a:spcPts val="0"/>
+              </a:spcAft>
+              <a:defRPr sz="2200" b="0">
+                <a:solidFill>
+                  <a:srgbClr val="202B35"/>
+                </a:solidFill>
+                <a:latin typeface="DejaVu Sans"/>
+              </a:defRPr>
+            </a:pPr>
+            <a:r>
+              <a:t>ERA5-Land weather, and terrain, climate, land-cover, and soil</a:t>
+            </a:r>
+          </a:p>
+          <a:p>
+            <a:pPr algn="l">
+              <a:lnSpc>
+                <a:spcPts val="2595"/>
+              </a:lnSpc>
+              <a:spcBef>
+                <a:spcPts val="0"/>
+              </a:spcBef>
+              <a:spcAft>
+                <a:spcPts val="0"/>
+              </a:spcAft>
+              <a:defRPr sz="2200" b="0">
+                <a:solidFill>
+                  <a:srgbClr val="202B35"/>
+                </a:solidFill>
+                <a:latin typeface="DejaVu Sans"/>
+              </a:defRPr>
+            </a:pPr>
+            <a:r>
+              <a:t>descriptors.</a:t>
             </a:r>
           </a:p>
         </p:txBody>
@@ -4587,8 +4653,8 @@
         </p:nvSpPr>
         <p:spPr>
           <a:xfrm>
-            <a:off x="685800" y="17569433"/>
-            <a:ext cx="10058400" cy="1318767"/>
+            <a:off x="685800" y="18228818"/>
+            <a:ext cx="10058400" cy="989075"/>
           </a:xfrm>
           <a:prstGeom prst="rect">
             <a:avLst/>
@@ -4619,7 +4685,7 @@
               </a:defRPr>
             </a:pPr>
             <a:r>
-              <a:t>The pipeline aligns sources daily, fills observation gaps, smooths the</a:t>
+              <a:t>The pipeline puts observations on a daily grid, fills gaps, smooths the</a:t>
             </a:r>
           </a:p>
           <a:p>
@@ -4641,7 +4707,7 @@
               </a:defRPr>
             </a:pPr>
             <a:r>
-              <a:t>series, and derives recent-history features. Both approaches receive</a:t>
+              <a:t>time series, and calculates features describing recent satellite readings</a:t>
             </a:r>
           </a:p>
           <a:p>
@@ -4663,29 +4729,7 @@
               </a:defRPr>
             </a:pPr>
             <a:r>
-              <a:t>identical prepared inputs, keeping the comparison focused on grouping</a:t>
-            </a:r>
-          </a:p>
-          <a:p>
-            <a:pPr algn="l">
-              <a:lnSpc>
-                <a:spcPts val="2595"/>
-              </a:lnSpc>
-              <a:spcBef>
-                <a:spcPts val="0"/>
-              </a:spcBef>
-              <a:spcAft>
-                <a:spcPts val="0"/>
-              </a:spcAft>
-              <a:defRPr sz="2200" b="0">
-                <a:solidFill>
-                  <a:srgbClr val="202B35"/>
-                </a:solidFill>
-                <a:latin typeface="DejaVu Sans"/>
-              </a:defRPr>
-            </a:pPr>
-            <a:r>
-              <a:t>and assignment.</a:t>
+              <a:t>and weather.</a:t>
             </a:r>
           </a:p>
         </p:txBody>
@@ -4698,7 +4742,7 @@
         </p:nvSpPr>
         <p:spPr>
           <a:xfrm>
-            <a:off x="731520" y="18997929"/>
+            <a:off x="731520" y="19327622"/>
             <a:ext cx="4663440" cy="932688"/>
           </a:xfrm>
           <a:prstGeom prst="roundRect">
@@ -4743,7 +4787,7 @@
         </p:nvSpPr>
         <p:spPr>
           <a:xfrm>
-            <a:off x="868680" y="19116801"/>
+            <a:off x="868680" y="19446494"/>
             <a:ext cx="4389120" cy="667512"/>
           </a:xfrm>
           <a:prstGeom prst="rect">
@@ -4775,7 +4819,7 @@
               </a:defRPr>
             </a:pPr>
             <a:r>
-              <a:t>2017–2022</a:t>
+              <a:t>2017 to 2022</a:t>
             </a:r>
           </a:p>
           <a:p>
@@ -4810,7 +4854,7 @@
         </p:nvSpPr>
         <p:spPr>
           <a:xfrm>
-            <a:off x="6035040" y="18997929"/>
+            <a:off x="6035040" y="19327622"/>
             <a:ext cx="4663440" cy="932688"/>
           </a:xfrm>
           <a:prstGeom prst="roundRect">
@@ -4855,7 +4899,7 @@
         </p:nvSpPr>
         <p:spPr>
           <a:xfrm>
-            <a:off x="6172200" y="19116801"/>
+            <a:off x="6172200" y="19446494"/>
             <a:ext cx="4389120" cy="667512"/>
           </a:xfrm>
           <a:prstGeom prst="rect">
@@ -4887,7 +4931,7 @@
               </a:defRPr>
             </a:pPr>
             <a:r>
-              <a:t>2023–2025</a:t>
+              <a:t>2023 to 2025</a:t>
             </a:r>
           </a:p>
           <a:p>
@@ -4922,7 +4966,7 @@
         </p:nvCxnSpPr>
         <p:spPr>
           <a:xfrm>
-            <a:off x="5522976" y="19464273"/>
+            <a:off x="5522976" y="19793966"/>
             <a:ext cx="411480" cy="0"/>
           </a:xfrm>
           <a:prstGeom prst="line">
@@ -4958,8 +5002,8 @@
         </p:nvSpPr>
         <p:spPr>
           <a:xfrm>
-            <a:off x="685800" y="20095209"/>
-            <a:ext cx="10058400" cy="1318767"/>
+            <a:off x="685800" y="20424902"/>
+            <a:ext cx="10058400" cy="989075"/>
           </a:xfrm>
           <a:prstGeom prst="rect">
             <a:avLst/>
@@ -4990,7 +5034,7 @@
               </a:defRPr>
             </a:pPr>
             <a:r>
-              <a:t>Development uses 2017–2020 training and 2021–2022 validation data;</a:t>
+              <a:t>Development uses 2017 to 2020 for training and 2021 to 2022 for</a:t>
             </a:r>
           </a:p>
           <a:p>
@@ -5012,7 +5056,7 @@
               </a:defRPr>
             </a:pPr>
             <a:r>
-              <a:t>the final fit combines these periods. Evaluation tests later years;</a:t>
+              <a:t>validation. The final fit combines both periods. We test later years and</a:t>
             </a:r>
           </a:p>
           <a:p>
@@ -5034,36 +5078,14 @@
               </a:defRPr>
             </a:pPr>
             <a:r>
-              <a:t>leave-one-station-out evaluation refits without each station to test new</a:t>
-            </a:r>
-          </a:p>
-          <a:p>
-            <a:pPr algn="l">
-              <a:lnSpc>
-                <a:spcPts val="2595"/>
-              </a:lnSpc>
-              <a:spcBef>
-                <a:spcPts val="0"/>
-              </a:spcBef>
-              <a:spcAft>
-                <a:spcPts val="0"/>
-              </a:spcAft>
-              <a:defRPr sz="2200" b="0">
-                <a:solidFill>
-                  <a:srgbClr val="202B35"/>
-                </a:solidFill>
-                <a:latin typeface="DejaVu Sans"/>
-              </a:defRPr>
-            </a:pPr>
-            <a:r>
-              <a:t>Washington locations.</a:t>
-            </a:r>
-          </a:p>
-        </p:txBody>
-      </p:sp>
-      <p:sp>
-        <p:nvSpPr>
-          <p:cNvPr id="31" name="Two-Regime Modeling"/>
+              <a:t>refit without each station in turn to evaluate new Washington locations.</a:t>
+            </a:r>
+          </a:p>
+        </p:txBody>
+      </p:sp>
+      <p:sp>
+        <p:nvSpPr>
+          <p:cNvPr id="31" name="Two-regime modeling"/>
           <p:cNvSpPr/>
           <p:nvPr/>
         </p:nvSpPr>
@@ -5148,7 +5170,7 @@
               </a:defRPr>
             </a:pPr>
             <a:r>
-              <a:t>Two-Regime Modeling</a:t>
+              <a:t>Two-regime modeling</a:t>
             </a:r>
           </a:p>
         </p:txBody>
@@ -5162,7 +5184,7 @@
         <p:spPr>
           <a:xfrm>
             <a:off x="11430000" y="3831336"/>
-            <a:ext cx="10058400" cy="989075"/>
+            <a:ext cx="10058400" cy="1318767"/>
           </a:xfrm>
           <a:prstGeom prst="rect">
             <a:avLst/>
@@ -5193,7 +5215,7 @@
               </a:defRPr>
             </a:pPr>
             <a:r>
-              <a:t>A global model fits all observations together. Our model groups</a:t>
+              <a:t>A global model learns one input-to-soil-moisture relationship from all</a:t>
             </a:r>
           </a:p>
           <a:p>
@@ -5215,7 +5237,7 @@
               </a:defRPr>
             </a:pPr>
             <a:r>
-              <a:t>observations by their inputs, then fits an XGBoost specialist per group.</a:t>
+              <a:t>stations. We divide observations into two groups and fit an XGBoost</a:t>
             </a:r>
           </a:p>
           <a:p>
@@ -5237,7 +5259,29 @@
               </a:defRPr>
             </a:pPr>
             <a:r>
-              <a:t>The target is daily volumetric soil moisture at 5 cm depth (m³/m³).</a:t>
+              <a:t>model to each. Each specialist predicts daily volumetric soil moisture</a:t>
+            </a:r>
+          </a:p>
+          <a:p>
+            <a:pPr algn="l">
+              <a:lnSpc>
+                <a:spcPts val="2595"/>
+              </a:lnSpc>
+              <a:spcBef>
+                <a:spcPts val="0"/>
+              </a:spcBef>
+              <a:spcAft>
+                <a:spcPts val="0"/>
+              </a:spcAft>
+              <a:defRPr sz="2200" b="0">
+                <a:solidFill>
+                  <a:srgbClr val="202B35"/>
+                </a:solidFill>
+                <a:latin typeface="DejaVu Sans"/>
+              </a:defRPr>
+            </a:pPr>
+            <a:r>
+              <a:t>at 5 cm depth (m³/m³).</a:t>
             </a:r>
           </a:p>
         </p:txBody>
@@ -5250,8 +5294,8 @@
         </p:nvSpPr>
         <p:spPr>
           <a:xfrm>
-            <a:off x="11430000" y="4930140"/>
-            <a:ext cx="3108960" cy="1024128"/>
+            <a:off x="11430000" y="5259832"/>
+            <a:ext cx="3108960" cy="1298448"/>
           </a:xfrm>
           <a:prstGeom prst="roundRect">
             <a:avLst>
@@ -5297,7 +5341,7 @@
         </p:nvSpPr>
         <p:spPr>
           <a:xfrm>
-            <a:off x="11521440" y="5012436"/>
+            <a:off x="11521440" y="5342128"/>
             <a:ext cx="2926080" cy="301752"/>
           </a:xfrm>
           <a:prstGeom prst="rect">
@@ -5329,7 +5373,7 @@
               </a:defRPr>
             </a:pPr>
             <a:r>
-              <a:t>SATELLITE</a:t>
+              <a:t>Satellite</a:t>
             </a:r>
           </a:p>
         </p:txBody>
@@ -5342,8 +5386,8 @@
         </p:nvSpPr>
         <p:spPr>
           <a:xfrm>
-            <a:off x="11503152" y="5332476"/>
-            <a:ext cx="2962656" cy="594360"/>
+            <a:off x="11503152" y="5662168"/>
+            <a:ext cx="2962656" cy="868680"/>
           </a:xfrm>
           <a:prstGeom prst="rect">
             <a:avLst/>
@@ -5374,7 +5418,7 @@
               </a:defRPr>
             </a:pPr>
             <a:r>
-              <a:t>Moisture, radar,</a:t>
+              <a:t>Moisture, backscatter,</a:t>
             </a:r>
           </a:p>
           <a:p>
@@ -5396,7 +5440,29 @@
               </a:defRPr>
             </a:pPr>
             <a:r>
-              <a:t>vegetation, heat</a:t>
+              <a:t>vegetation, land-surface</a:t>
+            </a:r>
+          </a:p>
+          <a:p>
+            <a:pPr algn="ctr">
+              <a:lnSpc>
+                <a:spcPts val="2242"/>
+              </a:lnSpc>
+              <a:spcBef>
+                <a:spcPts val="0"/>
+              </a:spcBef>
+              <a:spcAft>
+                <a:spcPts val="0"/>
+              </a:spcAft>
+              <a:defRPr sz="1900" b="0">
+                <a:solidFill>
+                  <a:srgbClr val="202B35"/>
+                </a:solidFill>
+                <a:latin typeface="DejaVu Sans"/>
+              </a:defRPr>
+            </a:pPr>
+            <a:r>
+              <a:t>temperature</a:t>
             </a:r>
           </a:p>
         </p:txBody>
@@ -5409,7 +5475,7 @@
         </p:nvCxnSpPr>
         <p:spPr>
           <a:xfrm>
-            <a:off x="12984480" y="5990844"/>
+            <a:off x="12984480" y="6594856"/>
             <a:ext cx="0" cy="155448"/>
           </a:xfrm>
           <a:prstGeom prst="line">
@@ -5444,8 +5510,8 @@
         </p:nvSpPr>
         <p:spPr>
           <a:xfrm>
-            <a:off x="14904720" y="4930140"/>
-            <a:ext cx="3108960" cy="1024128"/>
+            <a:off x="14904720" y="5259832"/>
+            <a:ext cx="3108960" cy="1298448"/>
           </a:xfrm>
           <a:prstGeom prst="roundRect">
             <a:avLst>
@@ -5491,7 +5557,7 @@
         </p:nvSpPr>
         <p:spPr>
           <a:xfrm>
-            <a:off x="14996160" y="5012436"/>
+            <a:off x="14996160" y="5342128"/>
             <a:ext cx="2926080" cy="301752"/>
           </a:xfrm>
           <a:prstGeom prst="rect">
@@ -5523,7 +5589,7 @@
               </a:defRPr>
             </a:pPr>
             <a:r>
-              <a:t>WEATHER</a:t>
+              <a:t>Weather</a:t>
             </a:r>
           </a:p>
         </p:txBody>
@@ -5536,8 +5602,8 @@
         </p:nvSpPr>
         <p:spPr>
           <a:xfrm>
-            <a:off x="14977872" y="5332476"/>
-            <a:ext cx="2962656" cy="594360"/>
+            <a:off x="14977872" y="5662168"/>
+            <a:ext cx="2962656" cy="868680"/>
           </a:xfrm>
           <a:prstGeom prst="rect">
             <a:avLst/>
@@ -5568,7 +5634,7 @@
               </a:defRPr>
             </a:pPr>
             <a:r>
-              <a:t>Rainfall and</a:t>
+              <a:t>Rainfall totals and</a:t>
             </a:r>
           </a:p>
           <a:p>
@@ -5590,7 +5656,7 @@
               </a:defRPr>
             </a:pPr>
             <a:r>
-              <a:t>recent history</a:t>
+              <a:t>recent rainfall history</a:t>
             </a:r>
           </a:p>
         </p:txBody>
@@ -5603,7 +5669,7 @@
         </p:nvCxnSpPr>
         <p:spPr>
           <a:xfrm>
-            <a:off x="16459200" y="5990844"/>
+            <a:off x="16459200" y="6594856"/>
             <a:ext cx="0" cy="155448"/>
           </a:xfrm>
           <a:prstGeom prst="line">
@@ -5638,8 +5704,8 @@
         </p:nvSpPr>
         <p:spPr>
           <a:xfrm>
-            <a:off x="18379440" y="4930140"/>
-            <a:ext cx="3108960" cy="1024128"/>
+            <a:off x="18379440" y="5259832"/>
+            <a:ext cx="3108960" cy="1298448"/>
           </a:xfrm>
           <a:prstGeom prst="roundRect">
             <a:avLst>
@@ -5685,7 +5751,7 @@
         </p:nvSpPr>
         <p:spPr>
           <a:xfrm>
-            <a:off x="18470880" y="5012436"/>
+            <a:off x="18470880" y="5342128"/>
             <a:ext cx="2926080" cy="301752"/>
           </a:xfrm>
           <a:prstGeom prst="rect">
@@ -5717,7 +5783,7 @@
               </a:defRPr>
             </a:pPr>
             <a:r>
-              <a:t>SITE</a:t>
+              <a:t>Site properties</a:t>
             </a:r>
           </a:p>
         </p:txBody>
@@ -5730,8 +5796,8 @@
         </p:nvSpPr>
         <p:spPr>
           <a:xfrm>
-            <a:off x="18452592" y="5332476"/>
-            <a:ext cx="2962656" cy="594360"/>
+            <a:off x="18452592" y="5662168"/>
+            <a:ext cx="2962656" cy="868680"/>
           </a:xfrm>
           <a:prstGeom prst="rect">
             <a:avLst/>
@@ -5784,7 +5850,7 @@
               </a:defRPr>
             </a:pPr>
             <a:r>
-              <a:t>land cover</a:t>
+              <a:t>land cover, soil</a:t>
             </a:r>
           </a:p>
         </p:txBody>
@@ -5797,7 +5863,7 @@
         </p:nvCxnSpPr>
         <p:spPr>
           <a:xfrm>
-            <a:off x="19933920" y="5990844"/>
+            <a:off x="19933920" y="6594856"/>
             <a:ext cx="0" cy="155448"/>
           </a:xfrm>
           <a:prstGeom prst="line">
@@ -5832,7 +5898,7 @@
         </p:nvCxnSpPr>
         <p:spPr>
           <a:xfrm>
-            <a:off x="12984480" y="6146292"/>
+            <a:off x="12984480" y="6750304"/>
             <a:ext cx="6949440" cy="0"/>
           </a:xfrm>
           <a:prstGeom prst="line">
@@ -5867,7 +5933,7 @@
         </p:nvCxnSpPr>
         <p:spPr>
           <a:xfrm>
-            <a:off x="16459200" y="6146292"/>
+            <a:off x="16459200" y="6750304"/>
             <a:ext cx="0" cy="137160"/>
           </a:xfrm>
           <a:prstGeom prst="line">
@@ -5903,7 +5969,7 @@
         </p:nvSpPr>
         <p:spPr>
           <a:xfrm>
-            <a:off x="12070080" y="6320028"/>
+            <a:off x="12070080" y="6924040"/>
             <a:ext cx="8778240" cy="1024128"/>
           </a:xfrm>
           <a:prstGeom prst="roundRect">
@@ -5950,7 +6016,7 @@
         </p:nvSpPr>
         <p:spPr>
           <a:xfrm>
-            <a:off x="12207240" y="6402324"/>
+            <a:off x="12207240" y="7006336"/>
             <a:ext cx="8503920" cy="393192"/>
           </a:xfrm>
           <a:prstGeom prst="rect">
@@ -5995,7 +6061,7 @@
         </p:nvSpPr>
         <p:spPr>
           <a:xfrm>
-            <a:off x="12207240" y="6841236"/>
+            <a:off x="12207240" y="7445248"/>
             <a:ext cx="8503920" cy="338328"/>
           </a:xfrm>
           <a:prstGeom prst="rect">
@@ -6027,7 +6093,7 @@
               </a:defRPr>
             </a:pPr>
             <a:r>
-              <a:t>Standardize → K-means → station consistency</a:t>
+              <a:t>Standardize → K-means → fixed groups for known stations</a:t>
             </a:r>
           </a:p>
         </p:txBody>
@@ -6040,7 +6106,7 @@
         </p:nvCxnSpPr>
         <p:spPr>
           <a:xfrm>
-            <a:off x="16459200" y="7389876"/>
+            <a:off x="16459200" y="7993888"/>
             <a:ext cx="0" cy="219456"/>
           </a:xfrm>
           <a:prstGeom prst="line">
@@ -6075,7 +6141,7 @@
         </p:nvCxnSpPr>
         <p:spPr>
           <a:xfrm>
-            <a:off x="13807440" y="7609332"/>
+            <a:off x="13807440" y="8213344"/>
             <a:ext cx="5303520" cy="0"/>
           </a:xfrm>
           <a:prstGeom prst="line">
@@ -6110,7 +6176,7 @@
         </p:nvCxnSpPr>
         <p:spPr>
           <a:xfrm>
-            <a:off x="13807440" y="7609332"/>
+            <a:off x="13807440" y="8213344"/>
             <a:ext cx="0" cy="219456"/>
           </a:xfrm>
           <a:prstGeom prst="line">
@@ -6146,7 +6212,7 @@
         </p:nvSpPr>
         <p:spPr>
           <a:xfrm>
-            <a:off x="11521440" y="7865364"/>
+            <a:off x="11521440" y="8469376"/>
             <a:ext cx="4572000" cy="1179576"/>
           </a:xfrm>
           <a:prstGeom prst="roundRect">
@@ -6191,7 +6257,7 @@
         </p:nvSpPr>
         <p:spPr>
           <a:xfrm>
-            <a:off x="11631168" y="7965948"/>
+            <a:off x="11631168" y="8569960"/>
             <a:ext cx="4352544" cy="365760"/>
           </a:xfrm>
           <a:prstGeom prst="rect">
@@ -6236,7 +6302,7 @@
         </p:nvSpPr>
         <p:spPr>
           <a:xfrm>
-            <a:off x="11631168" y="8395716"/>
+            <a:off x="11631168" y="8999728"/>
             <a:ext cx="4352544" cy="329184"/>
           </a:xfrm>
           <a:prstGeom prst="rect">
@@ -6281,7 +6347,7 @@
         </p:nvSpPr>
         <p:spPr>
           <a:xfrm>
-            <a:off x="11631168" y="8752332"/>
+            <a:off x="11631168" y="9356344"/>
             <a:ext cx="4352544" cy="265176"/>
           </a:xfrm>
           <a:prstGeom prst="rect">
@@ -6326,7 +6392,7 @@
         </p:nvCxnSpPr>
         <p:spPr>
           <a:xfrm>
-            <a:off x="13807440" y="9081516"/>
+            <a:off x="13807440" y="9685528"/>
             <a:ext cx="0" cy="201168"/>
           </a:xfrm>
           <a:prstGeom prst="line">
@@ -6361,7 +6427,7 @@
         </p:nvCxnSpPr>
         <p:spPr>
           <a:xfrm>
-            <a:off x="19110960" y="7609332"/>
+            <a:off x="19110960" y="8213344"/>
             <a:ext cx="0" cy="219456"/>
           </a:xfrm>
           <a:prstGeom prst="line">
@@ -6397,7 +6463,7 @@
         </p:nvSpPr>
         <p:spPr>
           <a:xfrm>
-            <a:off x="16824960" y="7865364"/>
+            <a:off x="16824960" y="8469376"/>
             <a:ext cx="4572000" cy="1179576"/>
           </a:xfrm>
           <a:prstGeom prst="roundRect">
@@ -6442,7 +6508,7 @@
         </p:nvSpPr>
         <p:spPr>
           <a:xfrm>
-            <a:off x="16934688" y="7965948"/>
+            <a:off x="16934688" y="8569960"/>
             <a:ext cx="4352544" cy="365760"/>
           </a:xfrm>
           <a:prstGeom prst="rect">
@@ -6487,7 +6553,7 @@
         </p:nvSpPr>
         <p:spPr>
           <a:xfrm>
-            <a:off x="16934688" y="8395716"/>
+            <a:off x="16934688" y="8999728"/>
             <a:ext cx="4352544" cy="329184"/>
           </a:xfrm>
           <a:prstGeom prst="rect">
@@ -6532,7 +6598,7 @@
         </p:nvSpPr>
         <p:spPr>
           <a:xfrm>
-            <a:off x="16934688" y="8752332"/>
+            <a:off x="16934688" y="9356344"/>
             <a:ext cx="4352544" cy="265176"/>
           </a:xfrm>
           <a:prstGeom prst="rect">
@@ -6577,7 +6643,7 @@
         </p:nvCxnSpPr>
         <p:spPr>
           <a:xfrm>
-            <a:off x="19110960" y="9081516"/>
+            <a:off x="19110960" y="9685528"/>
             <a:ext cx="0" cy="201168"/>
           </a:xfrm>
           <a:prstGeom prst="line">
@@ -6612,7 +6678,7 @@
         </p:nvCxnSpPr>
         <p:spPr>
           <a:xfrm>
-            <a:off x="13807440" y="9282684"/>
+            <a:off x="13807440" y="9886696"/>
             <a:ext cx="5303520" cy="0"/>
           </a:xfrm>
           <a:prstGeom prst="line">
@@ -6647,7 +6713,7 @@
         </p:nvCxnSpPr>
         <p:spPr>
           <a:xfrm>
-            <a:off x="16459200" y="9282684"/>
+            <a:off x="16459200" y="9886696"/>
             <a:ext cx="0" cy="173736"/>
           </a:xfrm>
           <a:prstGeom prst="line">
@@ -6683,7 +6749,7 @@
         </p:nvSpPr>
         <p:spPr>
           <a:xfrm>
-            <a:off x="12070080" y="9492996"/>
+            <a:off x="12070080" y="10097008"/>
             <a:ext cx="8778240" cy="978408"/>
           </a:xfrm>
           <a:prstGeom prst="roundRect">
@@ -6728,7 +6794,7 @@
         </p:nvSpPr>
         <p:spPr>
           <a:xfrm>
-            <a:off x="12207240" y="9566148"/>
+            <a:off x="12207240" y="10170160"/>
             <a:ext cx="8503920" cy="374904"/>
           </a:xfrm>
           <a:prstGeom prst="rect">
@@ -6773,7 +6839,7 @@
         </p:nvSpPr>
         <p:spPr>
           <a:xfrm>
-            <a:off x="12207240" y="10032492"/>
+            <a:off x="12207240" y="10636504"/>
             <a:ext cx="8503920" cy="347472"/>
           </a:xfrm>
           <a:prstGeom prst="rect">
@@ -6818,7 +6884,7 @@
         </p:nvSpPr>
         <p:spPr>
           <a:xfrm>
-            <a:off x="11430000" y="10581132"/>
+            <a:off x="11430000" y="11185144"/>
             <a:ext cx="10058400" cy="599439"/>
           </a:xfrm>
           <a:prstGeom prst="rect">
@@ -6850,7 +6916,7 @@
               </a:defRPr>
             </a:pPr>
             <a:r>
-              <a:t>Figure 2. Hard routing. x denotes inputs, s the station, g the assignment rule,</a:t>
+              <a:t>Figure 2. Each observation uses one specialist. x denotes the inputs, s the</a:t>
             </a:r>
           </a:p>
           <a:p>
@@ -6872,7 +6938,7 @@
               </a:defRPr>
             </a:pPr>
             <a:r>
-              <a:t>and fᵣ the selected specialist; one observation produces one estimate.</a:t>
+              <a:t>station, g the assignment rule, and fᵣ the selected model.</a:t>
             </a:r>
           </a:p>
         </p:txBody>
@@ -6885,7 +6951,7 @@
         </p:nvSpPr>
         <p:spPr>
           <a:xfrm>
-            <a:off x="11430000" y="11290300"/>
+            <a:off x="11430000" y="11894312"/>
             <a:ext cx="10058400" cy="1318767"/>
           </a:xfrm>
           <a:prstGeom prst="rect">
@@ -6917,7 +6983,7 @@
               </a:defRPr>
             </a:pPr>
             <a:r>
-              <a:t>1. Learn groups. Fill missing router values with fitting-data means and</a:t>
+              <a:t>1. We fill missing router inputs with their fitting-data means and</a:t>
             </a:r>
           </a:p>
           <a:p>
@@ -6939,7 +7005,7 @@
               </a:defRPr>
             </a:pPr>
             <a:r>
-              <a:t>standardize features before K-means finds two centroids. New</a:t>
+              <a:t>standardize features to comparable scales. K-means finds two cluster</a:t>
             </a:r>
           </a:p>
           <a:p>
@@ -6961,7 +7027,7 @@
               </a:defRPr>
             </a:pPr>
             <a:r>
-              <a:t>observations use the nearest centroid. Clustering uses no observed</a:t>
+              <a:t>centers; a new observation goes to the nearest center. The router uses</a:t>
             </a:r>
           </a:p>
           <a:p>
@@ -6983,7 +7049,7 @@
               </a:defRPr>
             </a:pPr>
             <a:r>
-              <a:t>in-situ targets.</a:t>
+              <a:t>inputs alone, without measured target labels.</a:t>
             </a:r>
           </a:p>
         </p:txBody>
@@ -6996,8 +7062,8 @@
         </p:nvSpPr>
         <p:spPr>
           <a:xfrm>
-            <a:off x="11430000" y="12718796"/>
-            <a:ext cx="10058400" cy="1318767"/>
+            <a:off x="11430000" y="13322808"/>
+            <a:ext cx="10058400" cy="989075"/>
           </a:xfrm>
           <a:prstGeom prst="rect">
             <a:avLst/>
@@ -7028,7 +7094,7 @@
               </a:defRPr>
             </a:pPr>
             <a:r>
-              <a:t>2. Keep stations consistent. Known stations receive their majority</a:t>
+              <a:t>2. For a station included in fitting, its most common group selects one</a:t>
             </a:r>
           </a:p>
           <a:p>
@@ -7050,7 +7116,7 @@
               </a:defRPr>
             </a:pPr>
             <a:r>
-              <a:t>fitting-data group, keeping observations with one specialist. New</a:t>
+              <a:t>specialist for all its observations. New stations receive an assignment</a:t>
             </a:r>
           </a:p>
           <a:p>
@@ -7072,29 +7138,7 @@
               </a:defRPr>
             </a:pPr>
             <a:r>
-              <a:t>stations use row-level assignment; availability checks can trigger the</a:t>
-            </a:r>
-          </a:p>
-          <a:p>
-            <a:pPr algn="l">
-              <a:lnSpc>
-                <a:spcPts val="2595"/>
-              </a:lnSpc>
-              <a:spcBef>
-                <a:spcPts val="0"/>
-              </a:spcBef>
-              <a:spcAft>
-                <a:spcPts val="0"/>
-              </a:spcAft>
-              <a:defRPr sz="2200" b="0">
-                <a:solidFill>
-                  <a:srgbClr val="202B35"/>
-                </a:solidFill>
-                <a:latin typeface="DejaVu Sans"/>
-              </a:defRPr>
-            </a:pPr>
-            <a:r>
-              <a:t>fallback described at right.</a:t>
+              <a:t>each day. Missing routing inputs can trigger the precipitation fallback.</a:t>
             </a:r>
           </a:p>
         </p:txBody>
@@ -7107,8 +7151,8 @@
         </p:nvSpPr>
         <p:spPr>
           <a:xfrm>
-            <a:off x="11430000" y="14147292"/>
-            <a:ext cx="10058400" cy="1318767"/>
+            <a:off x="11430000" y="14421612"/>
+            <a:ext cx="10058400" cy="1648459"/>
           </a:xfrm>
           <a:prstGeom prst="rect">
             <a:avLst/>
@@ -7139,7 +7183,7 @@
               </a:defRPr>
             </a:pPr>
             <a:r>
-              <a:t>3. Isolate specialization. Both approaches use identical features,</a:t>
+              <a:t>3. Both approaches use identical features, XGBoost settings,</a:t>
             </a:r>
           </a:p>
           <a:p>
@@ -7161,7 +7205,7 @@
               </a:defRPr>
             </a:pPr>
             <a:r>
-              <a:t>XGBoost settings, evaluation rows, and matched seeds. Specialists</a:t>
+              <a:t>evaluation observations, and random seeds. Each specialist trains on</a:t>
             </a:r>
           </a:p>
           <a:p>
@@ -7183,7 +7227,7 @@
               </a:defRPr>
             </a:pPr>
             <a:r>
-              <a:t>learn only from assigned observations, so differences reflect grouping</a:t>
+              <a:t>its assigned group. Seeds control training randomness; repeated fits</a:t>
             </a:r>
           </a:p>
           <a:p>
@@ -7205,20 +7249,42 @@
               </a:defRPr>
             </a:pPr>
             <a:r>
-              <a:t>and assignment under this protocol.</a:t>
-            </a:r>
-          </a:p>
-        </p:txBody>
-      </p:sp>
-      <p:sp>
-        <p:nvSpPr>
-          <p:cNvPr id="74" name="Regime Interpretation"/>
+              <a:t>measure training variation, leaving uncertainty across new sites and</a:t>
+            </a:r>
+          </a:p>
+          <a:p>
+            <a:pPr algn="l">
+              <a:lnSpc>
+                <a:spcPts val="2595"/>
+              </a:lnSpc>
+              <a:spcBef>
+                <a:spcPts val="0"/>
+              </a:spcBef>
+              <a:spcAft>
+                <a:spcPts val="0"/>
+              </a:spcAft>
+              <a:defRPr sz="2200" b="0">
+                <a:solidFill>
+                  <a:srgbClr val="202B35"/>
+                </a:solidFill>
+                <a:latin typeface="DejaVu Sans"/>
+              </a:defRPr>
+            </a:pPr>
+            <a:r>
+              <a:t>seasons unmeasured.</a:t>
+            </a:r>
+          </a:p>
+        </p:txBody>
+      </p:sp>
+      <p:sp>
+        <p:nvSpPr>
+          <p:cNvPr id="74" name="Regime interpretation"/>
           <p:cNvSpPr/>
           <p:nvPr/>
         </p:nvSpPr>
         <p:spPr>
           <a:xfrm>
-            <a:off x="11247120" y="15575788"/>
+            <a:off x="11247120" y="16179799"/>
             <a:ext cx="10424160" cy="502920"/>
           </a:xfrm>
           <a:prstGeom prst="roundRect">
@@ -7265,7 +7331,7 @@
         </p:nvSpPr>
         <p:spPr>
           <a:xfrm>
-            <a:off x="11338560" y="15596819"/>
+            <a:off x="11338560" y="16200831"/>
             <a:ext cx="10241280" cy="466344"/>
           </a:xfrm>
           <a:prstGeom prst="rect">
@@ -7297,7 +7363,7 @@
               </a:defRPr>
             </a:pPr>
             <a:r>
-              <a:t>Regime Interpretation</a:t>
+              <a:t>Regime interpretation</a:t>
             </a:r>
           </a:p>
         </p:txBody>
@@ -7310,7 +7376,7 @@
         </p:nvSpPr>
         <p:spPr>
           <a:xfrm>
-            <a:off x="11430000" y="16234155"/>
+            <a:off x="11430000" y="16838167"/>
             <a:ext cx="4754880" cy="2587752"/>
           </a:xfrm>
           <a:prstGeom prst="roundRect">
@@ -7357,7 +7423,7 @@
         </p:nvSpPr>
         <p:spPr>
           <a:xfrm>
-            <a:off x="11430000" y="16234155"/>
+            <a:off x="11430000" y="16838167"/>
             <a:ext cx="4754880" cy="64008"/>
           </a:xfrm>
           <a:prstGeom prst="rect">
@@ -7400,7 +7466,7 @@
         </p:nvSpPr>
         <p:spPr>
           <a:xfrm>
-            <a:off x="11594592" y="16398747"/>
+            <a:off x="11594592" y="17002759"/>
             <a:ext cx="4425696" cy="365760"/>
           </a:xfrm>
           <a:prstGeom prst="rect">
@@ -7445,7 +7511,7 @@
         </p:nvSpPr>
         <p:spPr>
           <a:xfrm>
-            <a:off x="11594592" y="16828515"/>
+            <a:off x="11594592" y="17432527"/>
             <a:ext cx="4425696" cy="310896"/>
           </a:xfrm>
           <a:prstGeom prst="rect">
@@ -7477,7 +7543,7 @@
               </a:defRPr>
             </a:pPr>
             <a:r>
-              <a:t>5 fitted stations</a:t>
+              <a:t>5 training stations</a:t>
             </a:r>
           </a:p>
         </p:txBody>
@@ -7490,7 +7556,7 @@
         </p:nvSpPr>
         <p:spPr>
           <a:xfrm>
-            <a:off x="11594592" y="17230852"/>
+            <a:off x="11594592" y="17834863"/>
             <a:ext cx="4425696" cy="923544"/>
           </a:xfrm>
           <a:prstGeom prst="rect">
@@ -7522,7 +7588,7 @@
               </a:defRPr>
             </a:pPr>
             <a:r>
-              <a:t>Western and Cascade sites;</a:t>
+              <a:t>Western and Cascade sites:</a:t>
             </a:r>
           </a:p>
           <a:p>
@@ -7566,7 +7632,7 @@
               </a:defRPr>
             </a:pPr>
             <a:r>
-              <a:t>satellite moisture.</a:t>
+              <a:t>SMAP soil moisture.</a:t>
             </a:r>
           </a:p>
         </p:txBody>
@@ -7579,7 +7645,7 @@
         </p:nvSpPr>
         <p:spPr>
           <a:xfrm>
-            <a:off x="11594592" y="18136107"/>
+            <a:off x="11594592" y="18740119"/>
             <a:ext cx="4425696" cy="576072"/>
           </a:xfrm>
           <a:prstGeom prst="rect">
@@ -7633,7 +7699,7 @@
               </a:defRPr>
             </a:pPr>
             <a:r>
-              <a:t>Satellite moisture: 0.414 m³/m³</a:t>
+              <a:t>SMAP soil moisture: 0.414 m³/m³</a:t>
             </a:r>
           </a:p>
         </p:txBody>
@@ -7646,7 +7712,7 @@
         </p:nvSpPr>
         <p:spPr>
           <a:xfrm>
-            <a:off x="16733520" y="16234155"/>
+            <a:off x="16733520" y="16838167"/>
             <a:ext cx="4754880" cy="2587752"/>
           </a:xfrm>
           <a:prstGeom prst="roundRect">
@@ -7693,7 +7759,7 @@
         </p:nvSpPr>
         <p:spPr>
           <a:xfrm>
-            <a:off x="16733520" y="16234155"/>
+            <a:off x="16733520" y="16838167"/>
             <a:ext cx="4754880" cy="64008"/>
           </a:xfrm>
           <a:prstGeom prst="rect">
@@ -7736,7 +7802,7 @@
         </p:nvSpPr>
         <p:spPr>
           <a:xfrm>
-            <a:off x="16898112" y="16398747"/>
+            <a:off x="16898112" y="17002759"/>
             <a:ext cx="4425696" cy="365760"/>
           </a:xfrm>
           <a:prstGeom prst="rect">
@@ -7781,7 +7847,7 @@
         </p:nvSpPr>
         <p:spPr>
           <a:xfrm>
-            <a:off x="16898112" y="16828515"/>
+            <a:off x="16898112" y="17432527"/>
             <a:ext cx="4425696" cy="310896"/>
           </a:xfrm>
           <a:prstGeom prst="rect">
@@ -7813,7 +7879,7 @@
               </a:defRPr>
             </a:pPr>
             <a:r>
-              <a:t>2 fitted stations</a:t>
+              <a:t>2 training stations</a:t>
             </a:r>
           </a:p>
         </p:txBody>
@@ -7826,7 +7892,7 @@
         </p:nvSpPr>
         <p:spPr>
           <a:xfrm>
-            <a:off x="16898112" y="17230852"/>
+            <a:off x="16898112" y="17834863"/>
             <a:ext cx="4425696" cy="923544"/>
           </a:xfrm>
           <a:prstGeom prst="rect">
@@ -7858,7 +7924,7 @@
               </a:defRPr>
             </a:pPr>
             <a:r>
-              <a:t>Spokane and Sourdough Gulch;</a:t>
+              <a:t>Spokane and Sourdough Gulch:</a:t>
             </a:r>
           </a:p>
           <a:p>
@@ -7902,7 +7968,7 @@
               </a:defRPr>
             </a:pPr>
             <a:r>
-              <a:t>satellite moisture.</a:t>
+              <a:t>SMAP soil moisture.</a:t>
             </a:r>
           </a:p>
         </p:txBody>
@@ -7915,7 +7981,7 @@
         </p:nvSpPr>
         <p:spPr>
           <a:xfrm>
-            <a:off x="16898112" y="18136107"/>
+            <a:off x="16898112" y="18740119"/>
             <a:ext cx="4425696" cy="576072"/>
           </a:xfrm>
           <a:prstGeom prst="rect">
@@ -7969,7 +8035,7 @@
               </a:defRPr>
             </a:pPr>
             <a:r>
-              <a:t>Satellite moisture: 0.192 m³/m³</a:t>
+              <a:t>SMAP soil moisture: 0.192 m³/m³</a:t>
             </a:r>
           </a:p>
         </p:txBody>
@@ -7982,8 +8048,8 @@
         </p:nvSpPr>
         <p:spPr>
           <a:xfrm>
-            <a:off x="11430000" y="18986499"/>
-            <a:ext cx="10058400" cy="1318767"/>
+            <a:off x="11430000" y="19590511"/>
+            <a:ext cx="10058400" cy="1648459"/>
           </a:xfrm>
           <a:prstGeom prst="rect">
             <a:avLst/>
@@ -8014,7 +8080,7 @@
               </a:defRPr>
             </a:pPr>
             <a:r>
-              <a:t>These names describe this Washington sample; elevation alone does</a:t>
+              <a:t>The groups differ mainly in rainfall and SMAP soil moisture. The wetter</a:t>
             </a:r>
           </a:p>
           <a:p>
@@ -8036,7 +8102,7 @@
               </a:defRPr>
             </a:pPr>
             <a:r>
-              <a:t>not determine membership. The wet group includes lowland and</a:t>
+              <a:t>group includes lowland and mountain stations, so elevation alone does</a:t>
             </a:r>
           </a:p>
           <a:p>
@@ -8058,7 +8124,7 @@
               </a:defRPr>
             </a:pPr>
             <a:r>
-              <a:t>mountain stations. Medians summarize input conditions, not</a:t>
+              <a:t>not distinguish them. Values above are input-data medians. Two</a:t>
             </a:r>
           </a:p>
           <a:p>
@@ -8080,32 +8146,9 @@
               </a:defRPr>
             </a:pPr>
             <a:r>
-              <a:t>measured-moisture thresholds.</a:t>
-            </a:r>
-          </a:p>
-        </p:txBody>
-      </p:sp>
-      <p:sp>
-        <p:nvSpPr>
-          <p:cNvPr id="89" name="Poster text 087"/>
-          <p:cNvSpPr txBox="1"/>
-          <p:nvPr/>
-        </p:nvSpPr>
-        <p:spPr>
-          <a:xfrm>
-            <a:off x="11430000" y="20414995"/>
-            <a:ext cx="10058400" cy="989075"/>
-          </a:xfrm>
-          <a:prstGeom prst="rect">
-            <a:avLst/>
-          </a:prstGeom>
-          <a:noFill/>
-        </p:spPr>
-        <p:txBody>
-          <a:bodyPr wrap="none" anchor="t" lIns="0" rIns="0" tIns="0" bIns="0">
-            <a:spAutoFit/>
-          </a:bodyPr>
-          <a:lstStyle/>
+              <a:t>groups worked for these stations; other deployments should choose</a:t>
+            </a:r>
+          </a:p>
           <a:p>
             <a:pPr algn="l">
               <a:lnSpc>
@@ -8125,58 +8168,14 @@
               </a:defRPr>
             </a:pPr>
             <a:r>
-              <a:t>Specialists can learn narrower relationships, but require reliable</a:t>
-            </a:r>
-          </a:p>
-          <a:p>
-            <a:pPr algn="l">
-              <a:lnSpc>
-                <a:spcPts val="2595"/>
-              </a:lnSpc>
-              <a:spcBef>
-                <a:spcPts val="0"/>
-              </a:spcBef>
-              <a:spcAft>
-                <a:spcPts val="0"/>
-              </a:spcAft>
-              <a:defRPr sz="2200" b="0">
-                <a:solidFill>
-                  <a:srgbClr val="202B35"/>
-                </a:solidFill>
-                <a:latin typeface="DejaVu Sans"/>
-              </a:defRPr>
-            </a:pPr>
-            <a:r>
-              <a:t>assignment and representative training data. Select regime counts</a:t>
-            </a:r>
-          </a:p>
-          <a:p>
-            <a:pPr algn="l">
-              <a:lnSpc>
-                <a:spcPts val="2595"/>
-              </a:lnSpc>
-              <a:spcBef>
-                <a:spcPts val="0"/>
-              </a:spcBef>
-              <a:spcAft>
-                <a:spcPts val="0"/>
-              </a:spcAft>
-              <a:defRPr sz="2200" b="0">
-                <a:solidFill>
-                  <a:srgbClr val="202B35"/>
-                </a:solidFill>
-                <a:latin typeface="DejaVu Sans"/>
-              </a:defRPr>
-            </a:pPr>
-            <a:r>
-              <a:t>using local data; two groups are useful here.</a:t>
-            </a:r>
-          </a:p>
-        </p:txBody>
-      </p:sp>
-      <p:sp>
-        <p:nvSpPr>
-          <p:cNvPr id="90" name="Evaluation &amp; Results"/>
+              <a:t>their group count using local data.</a:t>
+            </a:r>
+          </a:p>
+        </p:txBody>
+      </p:sp>
+      <p:sp>
+        <p:nvSpPr>
+          <p:cNvPr id="89" name="Evaluation and results"/>
           <p:cNvSpPr/>
           <p:nvPr/>
         </p:nvSpPr>
@@ -8223,7 +8222,7 @@
       </p:sp>
       <p:sp>
         <p:nvSpPr>
-          <p:cNvPr id="91" name="Poster text 089"/>
+          <p:cNvPr id="90" name="Poster text 088"/>
           <p:cNvSpPr txBox="1"/>
           <p:nvPr/>
         </p:nvSpPr>
@@ -8261,14 +8260,14 @@
               </a:defRPr>
             </a:pPr>
             <a:r>
-              <a:t>Evaluation &amp; Results</a:t>
-            </a:r>
-          </a:p>
-        </p:txBody>
-      </p:sp>
-      <p:sp>
-        <p:nvSpPr>
-          <p:cNvPr id="92" name="Poster text 090"/>
+              <a:t>Evaluation and results</a:t>
+            </a:r>
+          </a:p>
+        </p:txBody>
+      </p:sp>
+      <p:sp>
+        <p:nvSpPr>
+          <p:cNvPr id="91" name="Poster text 089"/>
           <p:cNvSpPr txBox="1"/>
           <p:nvPr/>
         </p:nvSpPr>
@@ -8313,7 +8312,7 @@
       </p:sp>
       <p:sp>
         <p:nvSpPr>
-          <p:cNvPr id="93" name="Poster text 091"/>
+          <p:cNvPr id="92" name="Poster text 090"/>
           <p:cNvSpPr txBox="1"/>
           <p:nvPr/>
         </p:nvSpPr>
@@ -8358,7 +8357,7 @@
       </p:sp>
       <p:sp>
         <p:nvSpPr>
-          <p:cNvPr id="94" name="Poster text 092"/>
+          <p:cNvPr id="93" name="Poster text 091"/>
           <p:cNvSpPr txBox="1"/>
           <p:nvPr/>
         </p:nvSpPr>
@@ -8403,7 +8402,7 @@
       </p:sp>
       <p:sp>
         <p:nvSpPr>
-          <p:cNvPr id="95" name="Poster text 093"/>
+          <p:cNvPr id="94" name="Poster text 092"/>
           <p:cNvSpPr txBox="1"/>
           <p:nvPr/>
         </p:nvSpPr>
@@ -8448,7 +8447,7 @@
       </p:sp>
       <p:pic>
         <p:nvPicPr>
-          <p:cNvPr id="96" name="model_comparison" descr="model_comparison.png"/>
+          <p:cNvPr id="95" name="model_comparison" descr="model_comparison.png"/>
           <p:cNvPicPr>
             <a:picLocks noChangeAspect="1"/>
           </p:cNvPicPr>
@@ -8472,7 +8471,7 @@
       </p:pic>
       <p:sp>
         <p:nvSpPr>
-          <p:cNvPr id="97" name="Caption model_comparison"/>
+          <p:cNvPr id="96" name="Caption model_comparison"/>
           <p:cNvSpPr txBox="1"/>
           <p:nvPr/>
         </p:nvSpPr>
@@ -8510,7 +8509,7 @@
               </a:defRPr>
             </a:pPr>
             <a:r>
-              <a:t>Figure 3. Mean R²: 30 matched temporal seeds; five per station holdout.</a:t>
+              <a:t>Figure 3. Mean R² from 30 later-year runs and five per held-out station, with</a:t>
             </a:r>
           </a:p>
           <a:p>
@@ -8532,14 +8531,14 @@
               </a:defRPr>
             </a:pPr>
             <a:r>
-              <a:t>Higher is better.</a:t>
-            </a:r>
-          </a:p>
-        </p:txBody>
-      </p:sp>
-      <p:sp>
-        <p:nvSpPr>
-          <p:cNvPr id="98" name="Poster text 096"/>
+              <a:t>matched seeds. Higher is better.</a:t>
+            </a:r>
+          </a:p>
+        </p:txBody>
+      </p:sp>
+      <p:sp>
+        <p:nvSpPr>
+          <p:cNvPr id="97" name="Poster text 095"/>
           <p:cNvSpPr txBox="1"/>
           <p:nvPr/>
         </p:nvSpPr>
@@ -8577,7 +8576,7 @@
               </a:defRPr>
             </a:pPr>
             <a:r>
-              <a:t>Two-regime R² leads in all 30 later-year runs. Station-holdout</a:t>
+              <a:t>Two-regime R² is higher in all 30 later-year runs. Leaving out stations</a:t>
             </a:r>
           </a:p>
           <a:p>
@@ -8599,7 +8598,7 @@
               </a:defRPr>
             </a:pPr>
             <a:r>
-              <a:t>performance improves on average, with uneven benefits across</a:t>
+              <a:t>also favors specialization on average, although improvements vary by</a:t>
             </a:r>
           </a:p>
           <a:p>
@@ -8621,14 +8620,14 @@
               </a:defRPr>
             </a:pPr>
             <a:r>
-              <a:t>locations.</a:t>
+              <a:t>location.</a:t>
             </a:r>
           </a:p>
         </p:txBody>
       </p:sp>
       <p:pic>
         <p:nvPicPr>
-          <p:cNvPr id="99" name="held_out_station_effects" descr="held_out_station_effects.png"/>
+          <p:cNvPr id="98" name="held_out_station_effects" descr="held_out_station_effects.png"/>
           <p:cNvPicPr>
             <a:picLocks noChangeAspect="1"/>
           </p:cNvPicPr>
@@ -8652,7 +8651,7 @@
       </p:pic>
       <p:sp>
         <p:nvSpPr>
-          <p:cNvPr id="100" name="Caption held_out_station_effects"/>
+          <p:cNvPr id="99" name="Caption held_out_station_effects"/>
           <p:cNvSpPr txBox="1"/>
           <p:nvPr/>
         </p:nvSpPr>
@@ -8690,21 +8689,21 @@
               </a:defRPr>
             </a:pPr>
             <a:r>
-              <a:t>Figure 4. Five-seed station differences: four gains and three losses.</a:t>
-            </a:r>
-          </a:p>
-        </p:txBody>
-      </p:sp>
-      <p:sp>
-        <p:nvSpPr>
-          <p:cNvPr id="101" name="Poster text 099"/>
+              <a:t>Figure 4. Mean R² change: four gains and three losses (five runs).</a:t>
+            </a:r>
+          </a:p>
+        </p:txBody>
+      </p:sp>
+      <p:sp>
+        <p:nvSpPr>
+          <p:cNvPr id="100" name="Poster text 098"/>
           <p:cNvSpPr txBox="1"/>
           <p:nvPr/>
         </p:nvSpPr>
         <p:spPr>
           <a:xfrm>
             <a:off x="22174200" y="12714732"/>
-            <a:ext cx="10058400" cy="989075"/>
+            <a:ext cx="10058400" cy="659383"/>
           </a:xfrm>
           <a:prstGeom prst="rect">
             <a:avLst/>
@@ -8735,7 +8734,7 @@
               </a:defRPr>
             </a:pPr>
             <a:r>
-              <a:t>Cayuse Pass gains most. Eastern holdouts reduce representation of the</a:t>
+              <a:t>Cayuse Pass has the largest R² increase. Leaving out either eastern</a:t>
             </a:r>
           </a:p>
           <a:p>
@@ -8757,42 +8756,20 @@
               </a:defRPr>
             </a:pPr>
             <a:r>
-              <a:t>smaller regime. Seeds describe fitting variability, excluding uncertainty</a:t>
-            </a:r>
-          </a:p>
-          <a:p>
-            <a:pPr algn="l">
-              <a:lnSpc>
-                <a:spcPts val="2595"/>
-              </a:lnSpc>
-              <a:spcBef>
-                <a:spcPts val="0"/>
-              </a:spcBef>
-              <a:spcAft>
-                <a:spcPts val="0"/>
-              </a:spcAft>
-              <a:defRPr sz="2200" b="0">
-                <a:solidFill>
-                  <a:srgbClr val="202B35"/>
-                </a:solidFill>
-                <a:latin typeface="DejaVu Sans"/>
-              </a:defRPr>
-            </a:pPr>
-            <a:r>
-              <a:t>across new sites and seasons.</a:t>
-            </a:r>
-          </a:p>
-        </p:txBody>
-      </p:sp>
-      <p:sp>
-        <p:nvSpPr>
-          <p:cNvPr id="102" name="ECE Sensor-Site Evaluation"/>
+              <a:t>station reduces the smaller group's training coverage.</a:t>
+            </a:r>
+          </a:p>
+        </p:txBody>
+      </p:sp>
+      <p:sp>
+        <p:nvSpPr>
+          <p:cNvPr id="101" name="ECE sensor-site evaluation"/>
           <p:cNvSpPr/>
           <p:nvPr/>
         </p:nvSpPr>
         <p:spPr>
           <a:xfrm>
-            <a:off x="21991320" y="13813535"/>
+            <a:off x="21991320" y="13483844"/>
             <a:ext cx="10424160" cy="502920"/>
           </a:xfrm>
           <a:prstGeom prst="roundRect">
@@ -8833,13 +8810,13 @@
       </p:sp>
       <p:sp>
         <p:nvSpPr>
-          <p:cNvPr id="103" name="Poster text 101"/>
+          <p:cNvPr id="102" name="Poster text 100"/>
           <p:cNvSpPr txBox="1"/>
           <p:nvPr/>
         </p:nvSpPr>
         <p:spPr>
           <a:xfrm>
-            <a:off x="22082760" y="13834567"/>
+            <a:off x="22082760" y="13504875"/>
             <a:ext cx="10241280" cy="466344"/>
           </a:xfrm>
           <a:prstGeom prst="rect">
@@ -8871,20 +8848,20 @@
               </a:defRPr>
             </a:pPr>
             <a:r>
-              <a:t>ECE Sensor-Site Evaluation</a:t>
-            </a:r>
-          </a:p>
-        </p:txBody>
-      </p:sp>
-      <p:sp>
-        <p:nvSpPr>
-          <p:cNvPr id="104" name="Poster text 102"/>
+              <a:t>ECE sensor-site evaluation</a:t>
+            </a:r>
+          </a:p>
+        </p:txBody>
+      </p:sp>
+      <p:sp>
+        <p:nvSpPr>
+          <p:cNvPr id="103" name="Poster text 101"/>
           <p:cNvSpPr txBox="1"/>
           <p:nvPr/>
         </p:nvSpPr>
         <p:spPr>
           <a:xfrm>
-            <a:off x="22174200" y="14471904"/>
+            <a:off x="22174200" y="14142212"/>
             <a:ext cx="10058400" cy="1318767"/>
           </a:xfrm>
           <a:prstGeom prst="rect">
@@ -8916,7 +8893,7 @@
               </a:defRPr>
             </a:pPr>
             <a:r>
-              <a:t>Five new sites deployed by Seattle University's ECE team lacked all</a:t>
+              <a:t>Missing SMAP inputs at five new sites deployed by Seattle University's</a:t>
             </a:r>
           </a:p>
           <a:p>
@@ -8938,7 +8915,7 @@
               </a:defRPr>
             </a:pPr>
             <a:r>
-              <a:t>SMAP inputs. An automatic availability gate switched to</a:t>
+              <a:t>ECE team triggered automatic assignment using an index of recent</a:t>
             </a:r>
           </a:p>
           <a:p>
@@ -8960,7 +8937,7 @@
               </a:defRPr>
             </a:pPr>
             <a:r>
-              <a:t>antecedent-precipitation routing, with the specialist mapping selected</a:t>
+              <a:t>rainfall. We used Washington validation data to choose a specialist for</a:t>
             </a:r>
           </a:p>
           <a:p>
@@ -8982,14 +8959,14 @@
               </a:defRPr>
             </a:pPr>
             <a:r>
-              <a:t>using Washington validation.</a:t>
+              <a:t>each rainfall class.</a:t>
             </a:r>
           </a:p>
         </p:txBody>
       </p:sp>
       <p:pic>
         <p:nvPicPr>
-          <p:cNvPr id="105" name="ece_routing" descr="ece_routing.png"/>
+          <p:cNvPr id="104" name="ece_routing" descr="ece_routing.png"/>
           <p:cNvPicPr>
             <a:picLocks noChangeAspect="1"/>
           </p:cNvPicPr>
@@ -9003,7 +8980,7 @@
         </p:blipFill>
         <p:spPr>
           <a:xfrm>
-            <a:off x="22219920" y="15900400"/>
+            <a:off x="22219920" y="15570708"/>
             <a:ext cx="9966960" cy="1920240"/>
           </a:xfrm>
           <a:prstGeom prst="rect">
@@ -9013,13 +8990,13 @@
       </p:pic>
       <p:sp>
         <p:nvSpPr>
-          <p:cNvPr id="106" name="Caption ece_routing"/>
+          <p:cNvPr id="105" name="Caption ece_routing"/>
           <p:cNvSpPr txBox="1"/>
           <p:nvPr/>
         </p:nvSpPr>
         <p:spPr>
           <a:xfrm>
-            <a:off x="22174200" y="17884648"/>
+            <a:off x="22174200" y="17554955"/>
             <a:ext cx="10058400" cy="599439"/>
           </a:xfrm>
           <a:prstGeom prst="rect">
@@ -9051,7 +9028,7 @@
               </a:defRPr>
             </a:pPr>
             <a:r>
-              <a:t>Figure 5. ECE pooled RMSE: fallback approaches global-model error. Lower is</a:t>
+              <a:t>Figure 5. Pooled ECE RMSE. Rainfall fallback and global model errors are</a:t>
             </a:r>
           </a:p>
           <a:p>
@@ -9073,20 +9050,20 @@
               </a:defRPr>
             </a:pPr>
             <a:r>
-              <a:t>better.</a:t>
-            </a:r>
-          </a:p>
-        </p:txBody>
-      </p:sp>
-      <p:sp>
-        <p:nvSpPr>
-          <p:cNvPr id="107" name="Poster text 105"/>
+              <a:t>similar; lower is better.</a:t>
+            </a:r>
+          </a:p>
+        </p:txBody>
+      </p:sp>
+      <p:sp>
+        <p:nvSpPr>
+          <p:cNvPr id="106" name="Poster text 104"/>
           <p:cNvSpPr txBox="1"/>
           <p:nvPr/>
         </p:nvSpPr>
         <p:spPr>
           <a:xfrm>
-            <a:off x="22174200" y="18612104"/>
+            <a:off x="22174200" y="18282411"/>
             <a:ext cx="10058400" cy="989075"/>
           </a:xfrm>
           <a:prstGeom prst="rect">
@@ -9118,7 +9095,7 @@
               </a:defRPr>
             </a:pPr>
             <a:r>
-              <a:t>Across 150 daily observations (July 20–August 19, 2026), every fallback</a:t>
+              <a:t>For all 150 daily observations from July 20 to August 19, 2026, the</a:t>
             </a:r>
           </a:p>
           <a:p>
@@ -9140,7 +9117,7 @@
               </a:defRPr>
             </a:pPr>
             <a:r>
-              <a:t>row used one specialist. This short summer test supports a routing</a:t>
+              <a:t>fallback selected the same specialist. Full-season performance at these</a:t>
             </a:r>
           </a:p>
           <a:p>
@@ -9162,20 +9139,20 @@
               </a:defRPr>
             </a:pPr>
             <a:r>
-              <a:t>lesson, without establishing full-season superiority.</a:t>
-            </a:r>
-          </a:p>
-        </p:txBody>
-      </p:sp>
-      <p:sp>
-        <p:nvSpPr>
-          <p:cNvPr id="108" name="Discussion &amp; Next Steps"/>
+              <a:t>ECE sites remains untested.</a:t>
+            </a:r>
+          </a:p>
+        </p:txBody>
+      </p:sp>
+      <p:sp>
+        <p:nvSpPr>
+          <p:cNvPr id="107" name="Discussion and next steps"/>
           <p:cNvSpPr/>
           <p:nvPr/>
         </p:nvSpPr>
         <p:spPr>
           <a:xfrm>
-            <a:off x="21991320" y="19710908"/>
+            <a:off x="21991320" y="19381216"/>
             <a:ext cx="10424160" cy="502920"/>
           </a:xfrm>
           <a:prstGeom prst="roundRect">
@@ -9216,13 +9193,13 @@
       </p:sp>
       <p:sp>
         <p:nvSpPr>
-          <p:cNvPr id="109" name="Poster text 107"/>
+          <p:cNvPr id="108" name="Poster text 106"/>
           <p:cNvSpPr txBox="1"/>
           <p:nvPr/>
         </p:nvSpPr>
         <p:spPr>
           <a:xfrm>
-            <a:off x="22082760" y="19731939"/>
+            <a:off x="22082760" y="19402247"/>
             <a:ext cx="10241280" cy="466344"/>
           </a:xfrm>
           <a:prstGeom prst="rect">
@@ -9254,21 +9231,21 @@
               </a:defRPr>
             </a:pPr>
             <a:r>
-              <a:t>Discussion &amp; Next Steps</a:t>
-            </a:r>
-          </a:p>
-        </p:txBody>
-      </p:sp>
-      <p:sp>
-        <p:nvSpPr>
-          <p:cNvPr id="110" name="Poster text 108"/>
+              <a:t>Discussion and next steps</a:t>
+            </a:r>
+          </a:p>
+        </p:txBody>
+      </p:sp>
+      <p:sp>
+        <p:nvSpPr>
+          <p:cNvPr id="109" name="Poster text 107"/>
           <p:cNvSpPr txBox="1"/>
           <p:nvPr/>
         </p:nvSpPr>
         <p:spPr>
           <a:xfrm>
-            <a:off x="22174200" y="20369276"/>
-            <a:ext cx="10058400" cy="989075"/>
+            <a:off x="22174200" y="20039583"/>
+            <a:ext cx="10058400" cy="1318767"/>
           </a:xfrm>
           <a:prstGeom prst="rect">
             <a:avLst/>
@@ -9299,7 +9276,7 @@
               </a:defRPr>
             </a:pPr>
             <a:r>
-              <a:t>Specialization helps with reliable assignment and representative</a:t>
+              <a:t>These gains depend on reliable assignment and training sites that</a:t>
             </a:r>
           </a:p>
           <a:p>
@@ -9321,7 +9298,7 @@
               </a:defRPr>
             </a:pPr>
             <a:r>
-              <a:t>training sites. Next, evaluate more Washington stations and seasons</a:t>
+              <a:t>cover the conditions encountered. We will test more Washington sites</a:t>
             </a:r>
           </a:p>
           <a:p>
@@ -9343,7 +9320,29 @@
               </a:defRPr>
             </a:pPr>
             <a:r>
-              <a:t>with ECE sensors, and test routing when satellite coverage changes.</a:t>
+              <a:t>and seasons with ECE sensors, including changes in satellite</a:t>
+            </a:r>
+          </a:p>
+          <a:p>
+            <a:pPr algn="l">
+              <a:lnSpc>
+                <a:spcPts val="2595"/>
+              </a:lnSpc>
+              <a:spcBef>
+                <a:spcPts val="0"/>
+              </a:spcBef>
+              <a:spcAft>
+                <a:spcPts val="0"/>
+              </a:spcAft>
+              <a:defRPr sz="2200" b="0">
+                <a:solidFill>
+                  <a:srgbClr val="202B35"/>
+                </a:solidFill>
+                <a:latin typeface="DejaVu Sans"/>
+              </a:defRPr>
+            </a:pPr>
+            <a:r>
+              <a:t>availability.</a:t>
             </a:r>
           </a:p>
         </p:txBody>

--- a/writeup2/poster-summer-1.1/summer_showcase.pptx
+++ b/writeup2/poster-summer-1.1/summer_showcase.pptx
@@ -3523,7 +3523,7 @@
               </a:defRPr>
             </a:pPr>
             <a:r>
-              <a:t>Soil moisture is the amount of water held in soil. Daily estimates help</a:t>
+              <a:t>Soil moisture regulates agricultural productivity and drought resilience,</a:t>
             </a:r>
           </a:p>
           <a:p>
@@ -3545,7 +3545,7 @@
               </a:defRPr>
             </a:pPr>
             <a:r>
-              <a:t>with irrigation planning and drought monitoring. They show how</a:t>
+              <a:t>making daily estimates vital for water management. High-resolution</a:t>
             </a:r>
           </a:p>
           <a:p>
@@ -3567,7 +3567,7 @@
               </a:defRPr>
             </a:pPr>
             <a:r>
-              <a:t>moisture changes after rain and during dry periods, including places</a:t>
+              <a:t>modeling tracks moisture recharge and drydown dynamics, particularly</a:t>
             </a:r>
           </a:p>
           <a:p>
@@ -3589,7 +3589,7 @@
               </a:defRPr>
             </a:pPr>
             <a:r>
-              <a:t>with few direct measurements.</a:t>
+              <a:t>across regions lacking direct measurement infrastructure.</a:t>
             </a:r>
           </a:p>
         </p:txBody>
@@ -3634,7 +3634,7 @@
               </a:defRPr>
             </a:pPr>
             <a:r>
-              <a:t>Ground sensors measure moisture at individual sites. Satellite</a:t>
+              <a:t>While in-situ ground sensors offer accurate readings, they exist only at</a:t>
             </a:r>
           </a:p>
           <a:p>
@@ -3656,7 +3656,7 @@
               </a:defRPr>
             </a:pPr>
             <a:r>
-              <a:t>observations cover larger areas but are intermittent, with some</a:t>
+              <a:t>limited monitoring sites. Satellite observations span broader regions</a:t>
             </a:r>
           </a:p>
           <a:p>
@@ -3678,7 +3678,7 @@
               </a:defRPr>
             </a:pPr>
             <a:r>
-              <a:t>retrievals missing. We combine satellite, weather, and site data for</a:t>
+              <a:t>but remain intermittent with frequent data gaps. To generate daily</a:t>
             </a:r>
           </a:p>
           <a:p>
@@ -3700,7 +3700,7 @@
               </a:defRPr>
             </a:pPr>
             <a:r>
-              <a:t>daily estimates. Earlier work produced the pipeline and a global</a:t>
+              <a:t>estimates, multi-source modeling combines satellite, weather, and site</a:t>
             </a:r>
           </a:p>
           <a:p>
@@ -3722,7 +3722,7 @@
               </a:defRPr>
             </a:pPr>
             <a:r>
-              <a:t>XGBoost model.</a:t>
+              <a:t>data, extending an established pipeline and global XGBoost baseline.</a:t>
             </a:r>
           </a:p>
         </p:txBody>
@@ -3926,7 +3926,7 @@
               </a:defRPr>
             </a:pPr>
             <a:r>
-              <a:t>Our comparison uses the same evaluation conditions for both models.</a:t>
+              <a:t>Both models are compared under identical benchmarks. For known</a:t>
             </a:r>
           </a:p>
           <a:p>
@@ -3948,7 +3948,7 @@
               </a:defRPr>
             </a:pPr>
             <a:r>
-              <a:t>For known stations, we fix a single specialist; tests at new sites</a:t>
+              <a:t>stations, we assign a fixed specialist; tests at new sites evaluate</a:t>
             </a:r>
           </a:p>
           <a:p>
@@ -3970,7 +3970,7 @@
               </a:defRPr>
             </a:pPr>
             <a:r>
-              <a:t>examine how missing satellite inputs affect assignment.</a:t>
+              <a:t>dynamic routing under missing satellite inputs.</a:t>
             </a:r>
           </a:p>
         </p:txBody>
@@ -4145,7 +4145,7 @@
         <p:spPr>
           <a:xfrm>
             <a:off x="7406640" y="11609070"/>
-            <a:ext cx="3337560" cy="3296919"/>
+            <a:ext cx="3337560" cy="2997200"/>
           </a:xfrm>
           <a:prstGeom prst="rect">
             <a:avLst/>
@@ -4176,7 +4176,7 @@
               </a:defRPr>
             </a:pPr>
             <a:r>
-              <a:t>Our stations span the</a:t>
+              <a:t>Stations span coastal</a:t>
             </a:r>
           </a:p>
           <a:p>
@@ -4198,7 +4198,7 @@
               </a:defRPr>
             </a:pPr>
             <a:r>
-              <a:t>coast, Cascade</a:t>
+              <a:t>areas, the Cascade</a:t>
             </a:r>
           </a:p>
           <a:p>
@@ -4220,7 +4220,7 @@
               </a:defRPr>
             </a:pPr>
             <a:r>
-              <a:t>mountains, and drier</a:t>
+              <a:t>mountains, and arid</a:t>
             </a:r>
           </a:p>
           <a:p>
@@ -4242,7 +4242,7 @@
               </a:defRPr>
             </a:pPr>
             <a:r>
-              <a:t>eastern Washington.</a:t>
+              <a:t>eastern Washington,</a:t>
             </a:r>
           </a:p>
           <a:p>
@@ -4264,7 +4264,7 @@
               </a:defRPr>
             </a:pPr>
             <a:r>
-              <a:t>They let us study how soil</a:t>
+              <a:t>capturing contrasting</a:t>
             </a:r>
           </a:p>
           <a:p>
@@ -4286,7 +4286,7 @@
               </a:defRPr>
             </a:pPr>
             <a:r>
-              <a:t>moisture relates to inputs</a:t>
+              <a:t>hydroclimatic regimes.</a:t>
             </a:r>
           </a:p>
           <a:p>
@@ -4308,7 +4308,7 @@
               </a:defRPr>
             </a:pPr>
             <a:r>
-              <a:t>under different</a:t>
+              <a:t>Leave-one-station-out</a:t>
             </a:r>
           </a:p>
           <a:p>
@@ -4330,7 +4330,7 @@
               </a:defRPr>
             </a:pPr>
             <a:r>
-              <a:t>conditions. Station</a:t>
+              <a:t>evaluations test model</a:t>
             </a:r>
           </a:p>
           <a:p>
@@ -4352,7 +4352,7 @@
               </a:defRPr>
             </a:pPr>
             <a:r>
-              <a:t>holdouts test whether the</a:t>
+              <a:t>generalization across</a:t>
             </a:r>
           </a:p>
           <a:p>
@@ -4374,29 +4374,7 @@
               </a:defRPr>
             </a:pPr>
             <a:r>
-              <a:t>models can estimate</a:t>
-            </a:r>
-          </a:p>
-          <a:p>
-            <a:pPr algn="l">
-              <a:lnSpc>
-                <a:spcPts val="2360"/>
-              </a:lnSpc>
-              <a:spcBef>
-                <a:spcPts val="0"/>
-              </a:spcBef>
-              <a:spcAft>
-                <a:spcPts val="0"/>
-              </a:spcAft>
-              <a:defRPr sz="2000" b="0">
-                <a:solidFill>
-                  <a:srgbClr val="536875"/>
-                </a:solidFill>
-                <a:latin typeface="DejaVu Sans"/>
-              </a:defRPr>
-            </a:pPr>
-            <a:r>
-              <a:t>moisture at a new site.</a:t>
+              <a:t>unseen microclimates.</a:t>
             </a:r>
           </a:p>
         </p:txBody>
@@ -4441,7 +4419,7 @@
               </a:defRPr>
             </a:pPr>
             <a:r>
-              <a:t>Figure 1. The seven training stations and their fitted groups. Colors identify</a:t>
+              <a:t>Figure 1. Seven Washington training stations and their assigned clusters.</a:t>
             </a:r>
           </a:p>
           <a:p>
@@ -4463,7 +4441,7 @@
               </a:defRPr>
             </a:pPr>
             <a:r>
-              <a:t>station assignments, with no geographic boundaries implied.</a:t>
+              <a:t>Colors designate cluster regimes, with no geographic boundaries implied.</a:t>
             </a:r>
           </a:p>
         </p:txBody>
@@ -4477,7 +4455,7 @@
         <p:spPr>
           <a:xfrm>
             <a:off x="685800" y="15811246"/>
-            <a:ext cx="10058400" cy="2307844"/>
+            <a:ext cx="10058400" cy="1978151"/>
           </a:xfrm>
           <a:prstGeom prst="rect">
             <a:avLst/>
@@ -4508,7 +4486,7 @@
               </a:defRPr>
             </a:pPr>
             <a:r>
-              <a:t>NOAA USCRN and SNOTEL stations provide measured soil moisture.</a:t>
+              <a:t>In-situ ground truth for soil moisture comes from NOAA USCRN and</a:t>
             </a:r>
           </a:p>
           <a:p>
@@ -4530,7 +4508,7 @@
               </a:defRPr>
             </a:pPr>
             <a:r>
-              <a:t>Satellite inputs include SMAP soil moisture, Sentinel-1 radar</a:t>
+              <a:t>SNOTEL stations. Satellite inputs comprise SMAP soil moisture,</a:t>
             </a:r>
           </a:p>
           <a:p>
@@ -4552,7 +4530,7 @@
               </a:defRPr>
             </a:pPr>
             <a:r>
-              <a:t>backscatter from the land surface, and Sentinel-2 surface reflectance</a:t>
+              <a:t>Sentinel-1 radar backscatter from the land surface, and Sentinel-2</a:t>
             </a:r>
           </a:p>
           <a:p>
@@ -4574,7 +4552,7 @@
               </a:defRPr>
             </a:pPr>
             <a:r>
-              <a:t>and indices of vegetation greenness and canopy water content. We</a:t>
+              <a:t>surface reflectance and indices of vegetation greenness and canopy</a:t>
             </a:r>
           </a:p>
           <a:p>
@@ -4596,7 +4574,7 @@
               </a:defRPr>
             </a:pPr>
             <a:r>
-              <a:t>also use MODIS land-surface temperature and vegetation indices,</a:t>
+              <a:t>water content. We use MODIS land-surface temperature, ERA5-Land</a:t>
             </a:r>
           </a:p>
           <a:p>
@@ -4618,29 +4596,7 @@
               </a:defRPr>
             </a:pPr>
             <a:r>
-              <a:t>ERA5-Land weather, and terrain, climate, land-cover, and soil</a:t>
-            </a:r>
-          </a:p>
-          <a:p>
-            <a:pPr algn="l">
-              <a:lnSpc>
-                <a:spcPts val="2595"/>
-              </a:lnSpc>
-              <a:spcBef>
-                <a:spcPts val="0"/>
-              </a:spcBef>
-              <a:spcAft>
-                <a:spcPts val="0"/>
-              </a:spcAft>
-              <a:defRPr sz="2200" b="0">
-                <a:solidFill>
-                  <a:srgbClr val="202B35"/>
-                </a:solidFill>
-                <a:latin typeface="DejaVu Sans"/>
-              </a:defRPr>
-            </a:pPr>
-            <a:r>
-              <a:t>descriptors.</a:t>
+              <a:t>weather, and terrain, soil, and climate descriptors.</a:t>
             </a:r>
           </a:p>
         </p:txBody>
@@ -4653,7 +4609,7 @@
         </p:nvSpPr>
         <p:spPr>
           <a:xfrm>
-            <a:off x="685800" y="18228818"/>
+            <a:off x="685800" y="17899126"/>
             <a:ext cx="10058400" cy="989075"/>
           </a:xfrm>
           <a:prstGeom prst="rect">
@@ -4685,7 +4641,7 @@
               </a:defRPr>
             </a:pPr>
             <a:r>
-              <a:t>The pipeline puts observations on a daily grid, fills gaps, smooths the</a:t>
+              <a:t>The data pipeline aligns observations onto a daily grid, imputes</a:t>
             </a:r>
           </a:p>
           <a:p>
@@ -4707,7 +4663,7 @@
               </a:defRPr>
             </a:pPr>
             <a:r>
-              <a:t>time series, and calculates features describing recent satellite readings</a:t>
+              <a:t>missing values, smooths temporal sequences, and extracts rolling lag</a:t>
             </a:r>
           </a:p>
           <a:p>
@@ -4729,7 +4685,7 @@
               </a:defRPr>
             </a:pPr>
             <a:r>
-              <a:t>and weather.</a:t>
+              <a:t>features capturing recent weather and satellite signals.</a:t>
             </a:r>
           </a:p>
         </p:txBody>
@@ -4742,7 +4698,7 @@
         </p:nvSpPr>
         <p:spPr>
           <a:xfrm>
-            <a:off x="731520" y="19327622"/>
+            <a:off x="731520" y="18997930"/>
             <a:ext cx="4663440" cy="932688"/>
           </a:xfrm>
           <a:prstGeom prst="roundRect">
@@ -4787,7 +4743,7 @@
         </p:nvSpPr>
         <p:spPr>
           <a:xfrm>
-            <a:off x="868680" y="19446494"/>
+            <a:off x="868680" y="19116802"/>
             <a:ext cx="4389120" cy="667512"/>
           </a:xfrm>
           <a:prstGeom prst="rect">
@@ -4854,7 +4810,7 @@
         </p:nvSpPr>
         <p:spPr>
           <a:xfrm>
-            <a:off x="6035040" y="19327622"/>
+            <a:off x="6035040" y="18997930"/>
             <a:ext cx="4663440" cy="932688"/>
           </a:xfrm>
           <a:prstGeom prst="roundRect">
@@ -4899,7 +4855,7 @@
         </p:nvSpPr>
         <p:spPr>
           <a:xfrm>
-            <a:off x="6172200" y="19446494"/>
+            <a:off x="6172200" y="19116802"/>
             <a:ext cx="4389120" cy="667512"/>
           </a:xfrm>
           <a:prstGeom prst="rect">
@@ -4966,7 +4922,7 @@
         </p:nvCxnSpPr>
         <p:spPr>
           <a:xfrm>
-            <a:off x="5522976" y="19793966"/>
+            <a:off x="5522976" y="19464274"/>
             <a:ext cx="411480" cy="0"/>
           </a:xfrm>
           <a:prstGeom prst="line">
@@ -5002,7 +4958,7 @@
         </p:nvSpPr>
         <p:spPr>
           <a:xfrm>
-            <a:off x="685800" y="20424902"/>
+            <a:off x="685800" y="20095210"/>
             <a:ext cx="10058400" cy="989075"/>
           </a:xfrm>
           <a:prstGeom prst="rect">
@@ -5034,7 +4990,7 @@
               </a:defRPr>
             </a:pPr>
             <a:r>
-              <a:t>Development uses 2017 to 2020 for training and 2021 to 2022 for</a:t>
+              <a:t>We train the models with data from 2017 to 2022. We evaluate</a:t>
             </a:r>
           </a:p>
           <a:p>
@@ -5056,7 +5012,7 @@
               </a:defRPr>
             </a:pPr>
             <a:r>
-              <a:t>validation. The final fit combines both periods. We test later years and</a:t>
+              <a:t>temporal generalization on later years (2023 to 2025) and test new</a:t>
             </a:r>
           </a:p>
           <a:p>
@@ -5078,7 +5034,7 @@
               </a:defRPr>
             </a:pPr>
             <a:r>
-              <a:t>refit without each station in turn to evaluate new Washington locations.</a:t>
+              <a:t>Washington sites using leave-one-station-out cross-validation.</a:t>
             </a:r>
           </a:p>
         </p:txBody>
@@ -5215,7 +5171,7 @@
               </a:defRPr>
             </a:pPr>
             <a:r>
-              <a:t>A global model learns one input-to-soil-moisture relationship from all</a:t>
+              <a:t>A single global model enforces one input-to-moisture mapping across</a:t>
             </a:r>
           </a:p>
           <a:p>
@@ -5237,7 +5193,7 @@
               </a:defRPr>
             </a:pPr>
             <a:r>
-              <a:t>stations. We divide observations into two groups and fit an XGBoost</a:t>
+              <a:t>all stations. We divide observations into two environmental regimes</a:t>
             </a:r>
           </a:p>
           <a:p>
@@ -5259,7 +5215,7 @@
               </a:defRPr>
             </a:pPr>
             <a:r>
-              <a:t>model to each. Each specialist predicts daily volumetric soil moisture</a:t>
+              <a:t>and fit a dedicated XGBoost specialist to each. Each specialist predicts</a:t>
             </a:r>
           </a:p>
           <a:p>
@@ -5281,7 +5237,7 @@
               </a:defRPr>
             </a:pPr>
             <a:r>
-              <a:t>at 5 cm depth (m³/m³).</a:t>
+              <a:t>daily volumetric soil moisture at 5 cm depth (m³/m³).</a:t>
             </a:r>
           </a:p>
         </p:txBody>
@@ -6916,7 +6872,7 @@
               </a:defRPr>
             </a:pPr>
             <a:r>
-              <a:t>Figure 2. Each observation uses one specialist. x denotes the inputs, s the</a:t>
+              <a:t>Figure 2. Two-regime routing: each observation is assigned to a specialist fᵣ,</a:t>
             </a:r>
           </a:p>
           <a:p>
@@ -6938,7 +6894,7 @@
               </a:defRPr>
             </a:pPr>
             <a:r>
-              <a:t>station, g the assignment rule, and fᵣ the selected model.</a:t>
+              <a:t>where x denotes input features, s the station, and g the routing function.</a:t>
             </a:r>
           </a:p>
         </p:txBody>
@@ -6983,7 +6939,7 @@
               </a:defRPr>
             </a:pPr>
             <a:r>
-              <a:t>1. We fill missing router inputs with their fitting-data means and</a:t>
+              <a:t>1. Router inputs are imputed using training-set means and</a:t>
             </a:r>
           </a:p>
           <a:p>
@@ -7005,7 +6961,7 @@
               </a:defRPr>
             </a:pPr>
             <a:r>
-              <a:t>standardize features to comparable scales. K-means finds two cluster</a:t>
+              <a:t>standardized to comparable scales. K-means clustering identifies two</a:t>
             </a:r>
           </a:p>
           <a:p>
@@ -7027,7 +6983,7 @@
               </a:defRPr>
             </a:pPr>
             <a:r>
-              <a:t>centers; a new observation goes to the nearest center. The router uses</a:t>
+              <a:t>centroids, assigning unseen samples to the nearest centroid using</a:t>
             </a:r>
           </a:p>
           <a:p>
@@ -7049,7 +7005,7 @@
               </a:defRPr>
             </a:pPr>
             <a:r>
-              <a:t>inputs alone, without measured target labels.</a:t>
+              <a:t>feature inputs alone without target labels.</a:t>
             </a:r>
           </a:p>
         </p:txBody>
@@ -7094,7 +7050,7 @@
               </a:defRPr>
             </a:pPr>
             <a:r>
-              <a:t>2. For a station included in fitting, its most common group selects one</a:t>
+              <a:t>2. For known stations, each adopts its majority cluster specialist for</a:t>
             </a:r>
           </a:p>
           <a:p>
@@ -7116,7 +7072,7 @@
               </a:defRPr>
             </a:pPr>
             <a:r>
-              <a:t>specialist for all its observations. New stations receive an assignment</a:t>
+              <a:t>temporal consistency. New stations are routed dynamically each day,</a:t>
             </a:r>
           </a:p>
           <a:p>
@@ -7138,7 +7094,7 @@
               </a:defRPr>
             </a:pPr>
             <a:r>
-              <a:t>each day. Missing routing inputs can trigger the precipitation fallback.</a:t>
+              <a:t>falling back to rainfall rules if satellite features are missing.</a:t>
             </a:r>
           </a:p>
         </p:txBody>
@@ -7205,7 +7161,7 @@
               </a:defRPr>
             </a:pPr>
             <a:r>
-              <a:t>evaluation observations, and random seeds. Each specialist trains on</a:t>
+              <a:t>evaluation splits, and random seeds. Each specialist trains solely on its</a:t>
             </a:r>
           </a:p>
           <a:p>
@@ -7227,7 +7183,7 @@
               </a:defRPr>
             </a:pPr>
             <a:r>
-              <a:t>its assigned group. Seeds control training randomness; repeated fits</a:t>
+              <a:t>assigned regime. Testing 30 repeated seeds quantifies training</a:t>
             </a:r>
           </a:p>
           <a:p>
@@ -7249,7 +7205,7 @@
               </a:defRPr>
             </a:pPr>
             <a:r>
-              <a:t>measure training variation, leaving uncertainty across new sites and</a:t>
+              <a:t>stability, while station-holdout splits evaluate spatial generalization</a:t>
             </a:r>
           </a:p>
           <a:p>
@@ -7271,7 +7227,7 @@
               </a:defRPr>
             </a:pPr>
             <a:r>
-              <a:t>seasons unmeasured.</a:t>
+              <a:t>uncertainty.</a:t>
             </a:r>
           </a:p>
         </p:txBody>
@@ -8080,7 +8036,7 @@
               </a:defRPr>
             </a:pPr>
             <a:r>
-              <a:t>The groups differ mainly in rainfall and SMAP soil moisture. The wetter</a:t>
+              <a:t>The regimes separate primarily along gradients of rainfall and SMAP</a:t>
             </a:r>
           </a:p>
           <a:p>
@@ -8102,7 +8058,7 @@
               </a:defRPr>
             </a:pPr>
             <a:r>
-              <a:t>group includes lowland and mountain stations, so elevation alone does</a:t>
+              <a:t>soil moisture. Because the wetter group includes lowland and</a:t>
             </a:r>
           </a:p>
           <a:p>
@@ -8124,7 +8080,7 @@
               </a:defRPr>
             </a:pPr>
             <a:r>
-              <a:t>not distinguish them. Values above are input-data medians. Two</a:t>
+              <a:t>mountain stations, elevation alone does not distinguish them.</a:t>
             </a:r>
           </a:p>
           <a:p>
@@ -8146,7 +8102,7 @@
               </a:defRPr>
             </a:pPr>
             <a:r>
-              <a:t>groups worked for these stations; other deployments should choose</a:t>
+              <a:t>Displayed values are input medians; other deployments should select</a:t>
             </a:r>
           </a:p>
           <a:p>
@@ -8168,7 +8124,7 @@
               </a:defRPr>
             </a:pPr>
             <a:r>
-              <a:t>their group count using local data.</a:t>
+              <a:t>cluster counts based on local environmental data.</a:t>
             </a:r>
           </a:p>
         </p:txBody>
@@ -8509,7 +8465,7 @@
               </a:defRPr>
             </a:pPr>
             <a:r>
-              <a:t>Figure 3. Mean R² from 30 later-year runs and five per held-out station, with</a:t>
+              <a:t>Figure 3. Mean R² across 30 later-year runs and five seeds per held-out</a:t>
             </a:r>
           </a:p>
           <a:p>
@@ -8531,7 +8487,7 @@
               </a:defRPr>
             </a:pPr>
             <a:r>
-              <a:t>matched seeds. Higher is better.</a:t>
+              <a:t>station, using matched seeds (higher is better).</a:t>
             </a:r>
           </a:p>
         </p:txBody>
@@ -8576,7 +8532,7 @@
               </a:defRPr>
             </a:pPr>
             <a:r>
-              <a:t>Two-regime R² is higher in all 30 later-year runs. Leaving out stations</a:t>
+              <a:t>The two-regime model achieves higher R² across all 30 later-year runs.</a:t>
             </a:r>
           </a:p>
           <a:p>
@@ -8598,7 +8554,7 @@
               </a:defRPr>
             </a:pPr>
             <a:r>
-              <a:t>also favors specialization on average, although improvements vary by</a:t>
+              <a:t>Spatial station holdouts also favor specialization on average (+0.0581</a:t>
             </a:r>
           </a:p>
           <a:p>
@@ -8620,7 +8576,7 @@
               </a:defRPr>
             </a:pPr>
             <a:r>
-              <a:t>location.</a:t>
+              <a:t>R²), though gains vary by regional coverage.</a:t>
             </a:r>
           </a:p>
         </p:txBody>
@@ -8689,7 +8645,7 @@
               </a:defRPr>
             </a:pPr>
             <a:r>
-              <a:t>Figure 4. Mean R² change: four gains and three losses (five runs).</a:t>
+              <a:t>Figure 4. Held-out station R² differences (four gains and three losses).</a:t>
             </a:r>
           </a:p>
         </p:txBody>
@@ -8703,7 +8659,7 @@
         <p:spPr>
           <a:xfrm>
             <a:off x="22174200" y="12714732"/>
-            <a:ext cx="10058400" cy="659383"/>
+            <a:ext cx="10058400" cy="989075"/>
           </a:xfrm>
           <a:prstGeom prst="rect">
             <a:avLst/>
@@ -8734,7 +8690,7 @@
               </a:defRPr>
             </a:pPr>
             <a:r>
-              <a:t>Cayuse Pass has the largest R² increase. Leaving out either eastern</a:t>
+              <a:t>Cayuse Pass gains +0.25 R². Conversely, withholding either eastern</a:t>
             </a:r>
           </a:p>
           <a:p>
@@ -8756,7 +8712,29 @@
               </a:defRPr>
             </a:pPr>
             <a:r>
-              <a:t>station reduces the smaller group's training coverage.</a:t>
+              <a:t>station removes half the drier group's data, underscoring sensitivity to</a:t>
+            </a:r>
+          </a:p>
+          <a:p>
+            <a:pPr algn="l">
+              <a:lnSpc>
+                <a:spcPts val="2595"/>
+              </a:lnSpc>
+              <a:spcBef>
+                <a:spcPts val="0"/>
+              </a:spcBef>
+              <a:spcAft>
+                <a:spcPts val="0"/>
+              </a:spcAft>
+              <a:defRPr sz="2200" b="0">
+                <a:solidFill>
+                  <a:srgbClr val="202B35"/>
+                </a:solidFill>
+                <a:latin typeface="DejaVu Sans"/>
+              </a:defRPr>
+            </a:pPr>
+            <a:r>
+              <a:t>sparse regional coverage.</a:t>
             </a:r>
           </a:p>
         </p:txBody>
@@ -8769,7 +8747,7 @@
         </p:nvSpPr>
         <p:spPr>
           <a:xfrm>
-            <a:off x="21991320" y="13483844"/>
+            <a:off x="21991320" y="13813535"/>
             <a:ext cx="10424160" cy="502920"/>
           </a:xfrm>
           <a:prstGeom prst="roundRect">
@@ -8816,7 +8794,7 @@
         </p:nvSpPr>
         <p:spPr>
           <a:xfrm>
-            <a:off x="22082760" y="13504875"/>
+            <a:off x="22082760" y="13834567"/>
             <a:ext cx="10241280" cy="466344"/>
           </a:xfrm>
           <a:prstGeom prst="rect">
@@ -8861,7 +8839,7 @@
         </p:nvSpPr>
         <p:spPr>
           <a:xfrm>
-            <a:off x="22174200" y="14142212"/>
+            <a:off x="22174200" y="14471904"/>
             <a:ext cx="10058400" cy="1318767"/>
           </a:xfrm>
           <a:prstGeom prst="rect">
@@ -8893,7 +8871,7 @@
               </a:defRPr>
             </a:pPr>
             <a:r>
-              <a:t>Missing SMAP inputs at five new sites deployed by Seattle University's</a:t>
+              <a:t>At five sensor sites deployed by Seattle University's ECE team, missing</a:t>
             </a:r>
           </a:p>
           <a:p>
@@ -8915,7 +8893,7 @@
               </a:defRPr>
             </a:pPr>
             <a:r>
-              <a:t>ECE team triggered automatic assignment using an index of recent</a:t>
+              <a:t>real-time SMAP retrievals triggered an automated fallback router using</a:t>
             </a:r>
           </a:p>
           <a:p>
@@ -8937,7 +8915,7 @@
               </a:defRPr>
             </a:pPr>
             <a:r>
-              <a:t>rainfall. We used Washington validation data to choose a specialist for</a:t>
+              <a:t>recent rainfall history. Regime thresholds were calibrated on</a:t>
             </a:r>
           </a:p>
           <a:p>
@@ -8959,7 +8937,7 @@
               </a:defRPr>
             </a:pPr>
             <a:r>
-              <a:t>each rainfall class.</a:t>
+              <a:t>Washington validation data without target labels.</a:t>
             </a:r>
           </a:p>
         </p:txBody>
@@ -8980,7 +8958,7 @@
         </p:blipFill>
         <p:spPr>
           <a:xfrm>
-            <a:off x="22219920" y="15570708"/>
+            <a:off x="22219920" y="15900400"/>
             <a:ext cx="9966960" cy="1920240"/>
           </a:xfrm>
           <a:prstGeom prst="rect">
@@ -8996,7 +8974,7 @@
         </p:nvSpPr>
         <p:spPr>
           <a:xfrm>
-            <a:off x="22174200" y="17554955"/>
+            <a:off x="22174200" y="17884648"/>
             <a:ext cx="10058400" cy="599439"/>
           </a:xfrm>
           <a:prstGeom prst="rect">
@@ -9028,7 +9006,7 @@
               </a:defRPr>
             </a:pPr>
             <a:r>
-              <a:t>Figure 5. Pooled ECE RMSE. Rainfall fallback and global model errors are</a:t>
+              <a:t>Figure 5. Pooled RMSE at ECE sites. The rainfall fallback matches global model</a:t>
             </a:r>
           </a:p>
           <a:p>
@@ -9050,7 +9028,7 @@
               </a:defRPr>
             </a:pPr>
             <a:r>
-              <a:t>similar; lower is better.</a:t>
+              <a:t>error (lower is better).</a:t>
             </a:r>
           </a:p>
         </p:txBody>
@@ -9063,7 +9041,7 @@
         </p:nvSpPr>
         <p:spPr>
           <a:xfrm>
-            <a:off x="22174200" y="18282411"/>
+            <a:off x="22174200" y="18612104"/>
             <a:ext cx="10058400" cy="989075"/>
           </a:xfrm>
           <a:prstGeom prst="rect">
@@ -9095,7 +9073,7 @@
               </a:defRPr>
             </a:pPr>
             <a:r>
-              <a:t>For all 150 daily observations from July 20 to August 19, 2026, the</a:t>
+              <a:t>During the dry summer period (July 20 to August 19, 2026; 150 daily</a:t>
             </a:r>
           </a:p>
           <a:p>
@@ -9117,7 +9095,7 @@
               </a:defRPr>
             </a:pPr>
             <a:r>
-              <a:t>fallback selected the same specialist. Full-season performance at these</a:t>
+              <a:t>observations), the fallback assigned all dates to the drier specialist.</a:t>
             </a:r>
           </a:p>
           <a:p>
@@ -9139,7 +9117,7 @@
               </a:defRPr>
             </a:pPr>
             <a:r>
-              <a:t>ECE sites remains untested.</a:t>
+              <a:t>Full-season multi-regime performance remains untested.</a:t>
             </a:r>
           </a:p>
         </p:txBody>
@@ -9152,7 +9130,7 @@
         </p:nvSpPr>
         <p:spPr>
           <a:xfrm>
-            <a:off x="21991320" y="19381216"/>
+            <a:off x="21991320" y="19710908"/>
             <a:ext cx="10424160" cy="502920"/>
           </a:xfrm>
           <a:prstGeom prst="roundRect">
@@ -9199,7 +9177,7 @@
         </p:nvSpPr>
         <p:spPr>
           <a:xfrm>
-            <a:off x="22082760" y="19402247"/>
+            <a:off x="22082760" y="19731939"/>
             <a:ext cx="10241280" cy="466344"/>
           </a:xfrm>
           <a:prstGeom prst="rect">
@@ -9244,8 +9222,8 @@
         </p:nvSpPr>
         <p:spPr>
           <a:xfrm>
-            <a:off x="22174200" y="20039583"/>
-            <a:ext cx="10058400" cy="1318767"/>
+            <a:off x="22174200" y="20369276"/>
+            <a:ext cx="10058400" cy="989075"/>
           </a:xfrm>
           <a:prstGeom prst="rect">
             <a:avLst/>
@@ -9276,7 +9254,7 @@
               </a:defRPr>
             </a:pPr>
             <a:r>
-              <a:t>These gains depend on reliable assignment and training sites that</a:t>
+              <a:t>Specialist gains rely on accurate routing and representative training</a:t>
             </a:r>
           </a:p>
           <a:p>
@@ -9298,7 +9276,7 @@
               </a:defRPr>
             </a:pPr>
             <a:r>
-              <a:t>cover the conditions encountered. We will test more Washington sites</a:t>
+              <a:t>networks. Future work evaluates multi-season ECE sensor data and</a:t>
             </a:r>
           </a:p>
           <a:p>
@@ -9320,29 +9298,7 @@
               </a:defRPr>
             </a:pPr>
             <a:r>
-              <a:t>and seasons with ECE sensors, including changes in satellite</a:t>
-            </a:r>
-          </a:p>
-          <a:p>
-            <a:pPr algn="l">
-              <a:lnSpc>
-                <a:spcPts val="2595"/>
-              </a:lnSpc>
-              <a:spcBef>
-                <a:spcPts val="0"/>
-              </a:spcBef>
-              <a:spcAft>
-                <a:spcPts val="0"/>
-              </a:spcAft>
-              <a:defRPr sz="2200" b="0">
-                <a:solidFill>
-                  <a:srgbClr val="202B35"/>
-                </a:solidFill>
-                <a:latin typeface="DejaVu Sans"/>
-              </a:defRPr>
-            </a:pPr>
-            <a:r>
-              <a:t>availability.</a:t>
+              <a:t>strengthens router robustness under intermittent satellite availability.</a:t>
             </a:r>
           </a:p>
         </p:txBody>
